--- a/10. Thank You/ThankYou.pptx
+++ b/10. Thank You/ThankYou.pptx
@@ -7,18 +7,14 @@
     <p:sldMasterId id="2147484523" r:id="rId6"/>
   </p:sldMasterIdLst>
   <p:notesMasterIdLst>
-    <p:notesMasterId r:id="rId19"/>
+    <p:notesMasterId r:id="rId9"/>
   </p:notesMasterIdLst>
   <p:handoutMasterIdLst>
-    <p:handoutMasterId r:id="rId20"/>
+    <p:handoutMasterId r:id="rId10"/>
   </p:handoutMasterIdLst>
   <p:sldIdLst>
-    <p:sldId id="274" r:id="rId26"/>
-    <p:sldId id="275" r:id="rId27"/>
-    <p:sldId id="276" r:id="rId28"/>
-    <p:sldId id="277" r:id="rId29"/>
-    <p:sldId id="278" r:id="rId30"/>
-    <p:sldId id="279" r:id="rId31"/>
+    <p:sldId id="1608" r:id="rId7"/>
+    <p:sldId id="1609" r:id="rId8"/>
   </p:sldIdLst>
   <p:sldSz cx="12436475" cy="6994525"/>
   <p:notesSz cx="6858000" cy="9144000"/>
@@ -246,7 +242,7 @@
               <a:rPr lang="en-US" smtClean="0">
                 <a:latin typeface="Segoe UI" pitchFamily="34" charset="0"/>
               </a:rPr>
-              <a:t>9/8/26 11:43 AM</a:t>
+              <a:t>9/14/26 8:08 PM</a:t>
             </a:fld>
             <a:endParaRPr lang="en-US">
               <a:latin typeface="Segoe UI" pitchFamily="34" charset="0"/>
@@ -524,7 +520,7 @@
           <a:p>
             <a:fld id="{D18B56EA-E28F-4F92-9F16-7A6F2501B303}" type="datetime8">
               <a:rPr lang="en-US" smtClean="0"/>
-              <a:t>9/8/26 11:43 AM</a:t>
+              <a:t>9/14/26 8:08 PM</a:t>
             </a:fld>
             <a:endParaRPr lang="en-US"/>
           </a:p>
@@ -769,8 +765,8 @@
 </p:notesMaster>
 </file>
 
-<file path=ppt/notesSlides/notesSlide13.xml><?xml version="1.0" encoding="utf-8"?>
-<p:notes xmlns:a="http://schemas.openxmlformats.org/drawingml/2006/main" xmlns:p="http://schemas.openxmlformats.org/presentationml/2006/main" xmlns:r="http://schemas.openxmlformats.org/officeDocument/2006/relationships">
+<file path=ppt/notesSlides/notesSlide1.xml><?xml version="1.0" encoding="utf-8"?>
+<p:notes xmlns:a="http://schemas.openxmlformats.org/drawingml/2006/main" xmlns:r="http://schemas.openxmlformats.org/officeDocument/2006/relationships" xmlns:p="http://schemas.openxmlformats.org/presentationml/2006/main">
   <p:cSld>
     <p:spTree>
       <p:nvGrpSpPr>
@@ -790,10 +786,10 @@
         <p:nvSpPr>
           <p:cNvPr id="2" name="Slide Image Placeholder 1"/>
           <p:cNvSpPr>
-            <a:spLocks noGrp="1"/>
+            <a:spLocks noGrp="1" noRot="1" noChangeAspect="1"/>
           </p:cNvSpPr>
           <p:nvPr>
-            <p:ph type="sldImg" idx="2"/>
+            <p:ph type="sldImg"/>
           </p:nvPr>
         </p:nvSpPr>
         <p:spPr/>
@@ -805,7 +801,7 @@
             <a:spLocks noGrp="1"/>
           </p:cNvSpPr>
           <p:nvPr>
-            <p:ph type="body" idx="3" sz="quarter"/>
+            <p:ph type="body" idx="1"/>
           </p:nvPr>
         </p:nvSpPr>
         <p:spPr/>
@@ -813,55 +809,120 @@
           <a:bodyPr/>
           <a:lstStyle/>
           <a:p>
-            <a:r>
-              <a:t>Day 1 was about one thread and how not to waste it. Here is what is worth keeping.</a:t>
-            </a:r>
-          </a:p>
-          <a:p/>
-          <a:p>
-            <a:r>
-              <a:t>A Task is not a thread. It is a small object that records whether work has finished, what the outcome was, and who is waiting to hear about it. Task.Run does not create a thread either. The Thread Pool does the running, and the Task only records the result when that work completes. Once you separate the work from the object that tracks the work, most async confusion goes away.</a:t>
-            </a:r>
-          </a:p>
-          <a:p/>
-          <a:p>
-            <a:r>
-              <a:t>Await is just a pattern. You proved that yourself when you gave CustomTask a GetAwaiter method and the compiler accepted it with no attributes and no registration. Every behavior you have ever debugged, thread switches, context capture, exceptions surfacing at the await instead of where they were thrown, lives in the awaiter and the task rather than in the keyword.</a:t>
-            </a:r>
-          </a:p>
-          <a:p/>
-          <a:p>
-            <a:r>
-              <a:t>The ambient data question has a three bucket answer. AsyncLocal-backed values flow with the ExecutionContext, so Thread.CurrentPrincipal and CultureInfo.CurrentCulture survive an await. [ThreadStatic] and SynchronizationContext.Current stay on the thread. Object references you already hold were never ambient at all, which is why some values look like they flowed when nothing flowed.</a:t>
-            </a:r>
-          </a:p>
-          <a:p/>
-          <a:p>
-            <a:r>
-              <a:t>And the rules from the mistakes section did not move. Await every Task, forward your token, and never block on .Wait() or .Result. Runtime Async in .NET 11 changes who builds the state machine. It changes none of that advice.</a:t>
-            </a:r>
-          </a:p>
-          <a:p/>
-          <a:p>
-            <a:r>
-              <a:t>https://learn.microsoft.com/dotnet/csharp/asynchronous-programming/</a:t>
-            </a:r>
+            <a:endParaRPr lang="en-US" dirty="0"/>
           </a:p>
         </p:txBody>
       </p:sp>
       <p:sp>
         <p:nvSpPr>
-          <p:cNvPr id="4" name="Slide Number Placeholder 3"/>
+          <p:cNvPr id="4" name="Header Placeholder 3"/>
           <p:cNvSpPr>
             <a:spLocks noGrp="1"/>
           </p:cNvSpPr>
           <p:nvPr>
-            <p:ph type="sldNum" idx="5" sz="quarter"/>
+            <p:ph type="hdr" sz="quarter"/>
           </p:nvPr>
         </p:nvSpPr>
         <p:spPr/>
+        <p:txBody>
+          <a:bodyPr/>
+          <a:lstStyle/>
+          <a:p>
+            <a:endParaRPr lang="en-US"/>
+          </a:p>
+        </p:txBody>
+      </p:sp>
+      <p:sp>
+        <p:nvSpPr>
+          <p:cNvPr id="5" name="Footer Placeholder 4"/>
+          <p:cNvSpPr>
+            <a:spLocks noGrp="1"/>
+          </p:cNvSpPr>
+          <p:nvPr>
+            <p:ph type="ftr" sz="quarter" idx="4"/>
+          </p:nvPr>
+        </p:nvSpPr>
+        <p:spPr/>
+        <p:txBody>
+          <a:bodyPr/>
+          <a:lstStyle/>
+          <a:p>
+            <a:pPr defTabSz="914099" eaLnBrk="0" hangingPunct="0"/>
+            <a:r>
+              <a:rPr lang="en-US" sz="400">
+                <a:gradFill>
+                  <a:gsLst>
+                    <a:gs pos="0">
+                      <a:prstClr val="black"/>
+                    </a:gs>
+                    <a:gs pos="100000">
+                      <a:prstClr val="black"/>
+                    </a:gs>
+                  </a:gsLst>
+                  <a:lin ang="5400000" scaled="0"/>
+                </a:gradFill>
+                <a:latin typeface="Segoe UI" pitchFamily="34" charset="0"/>
+                <a:ea typeface="Segoe UI" pitchFamily="34" charset="0"/>
+                <a:cs typeface="Segoe UI" pitchFamily="34" charset="0"/>
+              </a:rPr>
+              <a:t>© Microsoft Corporation. All rights reserved. MICROSOFT MAKES NO WARRANTIES, EXPRESS, IMPLIED OR STATUTORY, AS TO THE INFORMATION IN THIS PRESENTATION.</a:t>
+            </a:r>
+          </a:p>
+        </p:txBody>
+      </p:sp>
+      <p:sp>
+        <p:nvSpPr>
+          <p:cNvPr id="6" name="Date Placeholder 5"/>
+          <p:cNvSpPr>
+            <a:spLocks noGrp="1"/>
+          </p:cNvSpPr>
+          <p:nvPr>
+            <p:ph type="dt" idx="1"/>
+          </p:nvPr>
+        </p:nvSpPr>
+        <p:spPr/>
+        <p:txBody>
+          <a:bodyPr/>
+          <a:lstStyle/>
+          <a:p>
+            <a:fld id="{D18B56EA-E28F-4F92-9F16-7A6F2501B303}" type="datetime8">
+              <a:rPr lang="en-US" smtClean="0"/>
+              <a:t>9/14/26 8:08 PM</a:t>
+            </a:fld>
+            <a:endParaRPr lang="en-US"/>
+          </a:p>
+        </p:txBody>
+      </p:sp>
+      <p:sp>
+        <p:nvSpPr>
+          <p:cNvPr id="7" name="Slide Number Placeholder 6"/>
+          <p:cNvSpPr>
+            <a:spLocks noGrp="1"/>
+          </p:cNvSpPr>
+          <p:nvPr>
+            <p:ph type="sldNum" sz="quarter" idx="5"/>
+          </p:nvPr>
+        </p:nvSpPr>
+        <p:spPr/>
+        <p:txBody>
+          <a:bodyPr/>
+          <a:lstStyle/>
+          <a:p>
+            <a:fld id="{B4008EB6-D09E-4580-8CD6-DDB14511944F}" type="slidenum">
+              <a:rPr lang="en-US" smtClean="0"/>
+              <a:pPr/>
+              <a:t>1</a:t>
+            </a:fld>
+            <a:endParaRPr lang="en-US"/>
+          </a:p>
+        </p:txBody>
       </p:sp>
     </p:spTree>
+    <p:extLst>
+      <p:ext uri="{BB962C8B-B14F-4D97-AF65-F5344CB8AC3E}">
+        <p14:creationId xmlns:p14="http://schemas.microsoft.com/office/powerpoint/2010/main" val="3942133258"/>
+      </p:ext>
+    </p:extLst>
   </p:cSld>
   <p:clrMapOvr>
     <a:masterClrMapping/>
@@ -869,12 +930,18 @@
 </p:notes>
 </file>
 
-<file path=ppt/notesSlides/notesSlide14.xml><?xml version="1.0" encoding="utf-8"?>
-<p:notes xmlns:a="http://schemas.openxmlformats.org/drawingml/2006/main" xmlns:p="http://schemas.openxmlformats.org/presentationml/2006/main" xmlns:r="http://schemas.openxmlformats.org/officeDocument/2006/relationships">
+<file path=ppt/notesSlides/notesSlide2.xml><?xml version="1.0" encoding="utf-8"?>
+<p:notes xmlns:a="http://schemas.openxmlformats.org/drawingml/2006/main" xmlns:r="http://schemas.openxmlformats.org/officeDocument/2006/relationships" xmlns:p="http://schemas.openxmlformats.org/presentationml/2006/main">
   <p:cSld>
     <p:spTree>
       <p:nvGrpSpPr>
-        <p:cNvPr id="1" name=""/>
+        <p:cNvPr id="1" name="">
+          <a:extLst>
+            <a:ext uri="{FF2B5EF4-FFF2-40B4-BE49-F238E27FC236}">
+              <a16:creationId xmlns:a16="http://schemas.microsoft.com/office/drawing/2014/main" id="{4A381E2D-ECDA-44F7-557F-590B4DC5A430}"/>
+            </a:ext>
+          </a:extLst>
+        </p:cNvPr>
         <p:cNvGrpSpPr/>
         <p:nvPr/>
       </p:nvGrpSpPr>
@@ -888,24 +955,36 @@
       </p:grpSpPr>
       <p:sp>
         <p:nvSpPr>
-          <p:cNvPr id="2" name="Slide Image Placeholder 1"/>
+          <p:cNvPr id="2" name="Slide Image Placeholder 1">
+            <a:extLst>
+              <a:ext uri="{FF2B5EF4-FFF2-40B4-BE49-F238E27FC236}">
+                <a16:creationId xmlns:a16="http://schemas.microsoft.com/office/drawing/2014/main" id="{590F5482-086D-C48B-D006-517EA242AD6C}"/>
+              </a:ext>
+            </a:extLst>
+          </p:cNvPr>
           <p:cNvSpPr>
-            <a:spLocks noGrp="1"/>
+            <a:spLocks noGrp="1" noRot="1" noChangeAspect="1"/>
           </p:cNvSpPr>
           <p:nvPr>
-            <p:ph type="sldImg" idx="2"/>
+            <p:ph type="sldImg"/>
           </p:nvPr>
         </p:nvSpPr>
         <p:spPr/>
       </p:sp>
       <p:sp>
         <p:nvSpPr>
-          <p:cNvPr id="3" name="Notes Placeholder 2"/>
+          <p:cNvPr id="3" name="Notes Placeholder 2">
+            <a:extLst>
+              <a:ext uri="{FF2B5EF4-FFF2-40B4-BE49-F238E27FC236}">
+                <a16:creationId xmlns:a16="http://schemas.microsoft.com/office/drawing/2014/main" id="{5BD6ECEC-1EFB-22B6-F3CF-8D7040367B54}"/>
+              </a:ext>
+            </a:extLst>
+          </p:cNvPr>
           <p:cNvSpPr>
             <a:spLocks noGrp="1"/>
           </p:cNvSpPr>
           <p:nvPr>
-            <p:ph type="body" idx="3" sz="quarter"/>
+            <p:ph type="body" idx="1"/>
           </p:nvPr>
         </p:nvSpPr>
         <p:spPr/>
@@ -913,105 +992,24 @@
           <a:bodyPr/>
           <a:lstStyle/>
           <a:p>
-            <a:r>
-              <a:t>Day 2 was about many threads and the correctness bill that arrives with them.</a:t>
-            </a:r>
-          </a:p>
-          <a:p/>
-          <a:p>
-            <a:r>
-              <a:t>Waiting is not working. If the machine is idle because you are waiting on a network call, a database or a disk, adding threads just gives you more threads standing around. If the machine is busy because you are genuinely computing, awaiting buys you nothing, because there is nothing to wait for. Pick based on what is actually slow, and remember that Environment.ProcessorCount is the ceiling on the second one.</a:t>
-            </a:r>
-          </a:p>
-          <a:p/>
-          <a:p>
-            <a:r>
-              <a:t>Start early, await late. Calling an async method starts the work. The await only says you have nothing useful to do until it finishes. Task.WhenAll, Task.WhenAny and Task.WhenEach are three ways to wait on work that is already running, and none of the three start anything or create threads.</a:t>
-            </a:r>
-          </a:p>
-          <a:p/>
-          <a:p>
-            <a:r>
-              <a:t>Parallel.ForEach takes an Action of T. An async lambda bound to it becomes async void, so the loop returns before a single body has finished, with no warning, no work done, and any failure crashing the process instead of landing in your try block. Parallel.ForEachAsync is the overload that can await your body.</a:t>
-            </a:r>
-          </a:p>
-          <a:p/>
-          <a:p>
-            <a:r>
-              <a:t>Thread safe is not atomic. Every method on ConcurrentDictionary is safe on its own, and two safe calls in a row are still a race. AddOrUpdate and GetOrAdd exist so you do not have to invent that yourself.</a:t>
-            </a:r>
-          </a:p>
-          <a:p/>
-          <a:p>
-            <a:r>
-              <a:t>And a ConcurrentQueue is storage, while a Channel is storage plus asynchronous waiting, capacity and completion.</a:t>
-            </a:r>
-          </a:p>
-          <a:p/>
-          <a:p>
-            <a:r>
-              <a:t>https://learn.microsoft.com/dotnet/standard/parallel-programming/</a:t>
-            </a:r>
+            <a:endParaRPr lang="en-US" dirty="0"/>
           </a:p>
         </p:txBody>
       </p:sp>
       <p:sp>
         <p:nvSpPr>
-          <p:cNvPr id="4" name="Slide Number Placeholder 3"/>
+          <p:cNvPr id="4" name="Header Placeholder 3">
+            <a:extLst>
+              <a:ext uri="{FF2B5EF4-FFF2-40B4-BE49-F238E27FC236}">
+                <a16:creationId xmlns:a16="http://schemas.microsoft.com/office/drawing/2014/main" id="{4C415933-DC67-79C8-F56C-FFD43F058065}"/>
+              </a:ext>
+            </a:extLst>
+          </p:cNvPr>
           <p:cNvSpPr>
             <a:spLocks noGrp="1"/>
           </p:cNvSpPr>
           <p:nvPr>
-            <p:ph type="sldNum" idx="5" sz="quarter"/>
-          </p:nvPr>
-        </p:nvSpPr>
-        <p:spPr/>
-      </p:sp>
-    </p:spTree>
-  </p:cSld>
-  <p:clrMapOvr>
-    <a:masterClrMapping/>
-  </p:clrMapOvr>
-</p:notes>
-</file>
-
-<file path=ppt/notesSlides/notesSlide15.xml><?xml version="1.0" encoding="utf-8"?>
-<p:notes xmlns:a="http://schemas.openxmlformats.org/drawingml/2006/main" xmlns:p="http://schemas.openxmlformats.org/presentationml/2006/main" xmlns:r="http://schemas.openxmlformats.org/officeDocument/2006/relationships">
-  <p:cSld>
-    <p:spTree>
-      <p:nvGrpSpPr>
-        <p:cNvPr id="1" name=""/>
-        <p:cNvGrpSpPr/>
-        <p:nvPr/>
-      </p:nvGrpSpPr>
-      <p:grpSpPr>
-        <a:xfrm>
-          <a:off x="0" y="0"/>
-          <a:ext cx="0" cy="0"/>
-          <a:chOff x="0" y="0"/>
-          <a:chExt cx="0" cy="0"/>
-        </a:xfrm>
-      </p:grpSpPr>
-      <p:sp>
-        <p:nvSpPr>
-          <p:cNvPr id="2" name="Slide Image Placeholder 1"/>
-          <p:cNvSpPr>
-            <a:spLocks noGrp="1"/>
-          </p:cNvSpPr>
-          <p:nvPr>
-            <p:ph type="sldImg" idx="2"/>
-          </p:nvPr>
-        </p:nvSpPr>
-        <p:spPr/>
-      </p:sp>
-      <p:sp>
-        <p:nvSpPr>
-          <p:cNvPr id="3" name="Notes Placeholder 2"/>
-          <p:cNvSpPr>
-            <a:spLocks noGrp="1"/>
-          </p:cNvSpPr>
-          <p:nvPr>
-            <p:ph type="body" idx="3" sz="quarter"/>
+            <p:ph type="hdr" sz="quarter"/>
           </p:nvPr>
         </p:nvSpPr>
         <p:spPr/>
@@ -1019,105 +1017,24 @@
           <a:bodyPr/>
           <a:lstStyle/>
           <a:p>
-            <a:r>
-              <a:t>Two days, nine sections, and one question underneath all of it. Before you reach for an API, ask what kind of slow you are actually looking at.</a:t>
-            </a:r>
-          </a:p>
-          <a:p/>
-          <a:p>
-            <a:r>
-              <a:t>If the answer is waiting, the work is happening somewhere else and your thread is doing nothing. Await it, forward the token, and let that thread go serve somebody else. More threads there buy you nothing at all.</a:t>
-            </a:r>
-          </a:p>
-          <a:p/>
-          <a:p>
-            <a:r>
-              <a:t>If the answer is working, a thread really is busy and somebody has to do the work. Split the data, reach for the Parallel class or PLINQ, and accept that your core count is a hard ceiling.</a:t>
-            </a:r>
-          </a:p>
-          <a:p/>
-          <a:p>
-            <a:r>
-              <a:t>Most real code is both at once, which is why Parallel.ForEachAsync exists. When the body waits on a network call, MaxDegreeOfParallelism stops being a CPU setting and becomes a rate limit, and you should be able to say why you picked the number.</a:t>
-            </a:r>
-          </a:p>
-          <a:p/>
-          <a:p>
-            <a:r>
-              <a:t>Then ask the second half of the question. Which state can two threads now reach at the same time? A race needs all three of shared, mutable and unsynchronized, so the cheapest fixes are the ones that remove an ingredient. A local inside the loop body is not shared. An immutable record is not mutable. When you need all three, pick the guard by what you are guarding: Interlocked for a counter, Lock for a synchronous critical section, SemaphoreSlim when it has to await, Lazy of T for one time initialization, a concurrent collection for a collection, and a channel for a handoff.</a:t>
-            </a:r>
-          </a:p>
-          <a:p/>
-          <a:p>
-            <a:r>
-              <a:t>If you take one idea home from these two days, take this one.</a:t>
-            </a:r>
-          </a:p>
-          <a:p/>
-          <a:p>
-            <a:r>
-              <a:t>https://learn.microsoft.com/dotnet/standard/threading/overview-of-synchronization-primitives</a:t>
-            </a:r>
+            <a:endParaRPr lang="en-US"/>
           </a:p>
         </p:txBody>
       </p:sp>
       <p:sp>
         <p:nvSpPr>
-          <p:cNvPr id="4" name="Slide Number Placeholder 3"/>
+          <p:cNvPr id="5" name="Footer Placeholder 4">
+            <a:extLst>
+              <a:ext uri="{FF2B5EF4-FFF2-40B4-BE49-F238E27FC236}">
+                <a16:creationId xmlns:a16="http://schemas.microsoft.com/office/drawing/2014/main" id="{2FAD11B4-F560-A658-C002-256EFEDAE7AB}"/>
+              </a:ext>
+            </a:extLst>
+          </p:cNvPr>
           <p:cNvSpPr>
             <a:spLocks noGrp="1"/>
           </p:cNvSpPr>
           <p:nvPr>
-            <p:ph type="sldNum" idx="5" sz="quarter"/>
-          </p:nvPr>
-        </p:nvSpPr>
-        <p:spPr/>
-      </p:sp>
-    </p:spTree>
-  </p:cSld>
-  <p:clrMapOvr>
-    <a:masterClrMapping/>
-  </p:clrMapOvr>
-</p:notes>
-</file>
-
-<file path=ppt/notesSlides/notesSlide16.xml><?xml version="1.0" encoding="utf-8"?>
-<p:notes xmlns:a="http://schemas.openxmlformats.org/drawingml/2006/main" xmlns:p="http://schemas.openxmlformats.org/presentationml/2006/main" xmlns:r="http://schemas.openxmlformats.org/officeDocument/2006/relationships">
-  <p:cSld>
-    <p:spTree>
-      <p:nvGrpSpPr>
-        <p:cNvPr id="1" name=""/>
-        <p:cNvGrpSpPr/>
-        <p:nvPr/>
-      </p:nvGrpSpPr>
-      <p:grpSpPr>
-        <a:xfrm>
-          <a:off x="0" y="0"/>
-          <a:ext cx="0" cy="0"/>
-          <a:chOff x="0" y="0"/>
-          <a:chExt cx="0" cy="0"/>
-        </a:xfrm>
-      </p:grpSpPr>
-      <p:sp>
-        <p:nvSpPr>
-          <p:cNvPr id="2" name="Slide Image Placeholder 1"/>
-          <p:cNvSpPr>
-            <a:spLocks noGrp="1"/>
-          </p:cNvSpPr>
-          <p:nvPr>
-            <p:ph type="sldImg" idx="2"/>
-          </p:nvPr>
-        </p:nvSpPr>
-        <p:spPr/>
-      </p:sp>
-      <p:sp>
-        <p:nvSpPr>
-          <p:cNvPr id="3" name="Notes Placeholder 2"/>
-          <p:cNvSpPr>
-            <a:spLocks noGrp="1"/>
-          </p:cNvSpPr>
-          <p:nvPr>
-            <p:ph type="body" idx="3" sz="quarter"/>
+            <p:ph type="ftr" sz="quarter" idx="4"/>
           </p:nvPr>
         </p:nvSpPr>
         <p:spPr/>
@@ -1125,98 +1042,43 @@
           <a:bodyPr/>
           <a:lstStyle/>
           <a:p>
+            <a:pPr defTabSz="914099" eaLnBrk="0" hangingPunct="0"/>
             <a:r>
-              <a:t>Take the repo with you. It is public, it stays up, and it is the version of these two days you can actually re-run. Every deck, every 1. Start project, every 2. Finish project, and a SOLUTION.md for each section that walks the reasoning rather than just showing you the diff. The speaker notes ship with it too, so the explanations you heard out loud are readable later, on a Tuesday, when the bug is yours.</a:t>
-            </a:r>
-          </a:p>
-          <a:p/>
-          <a:p>
-            <a:r>
-              <a:t>Here is a good way to use it next week. Open a 1. Start project you did not finish, and do the challenge again cold, without the solution open. The second attempt is where this material moves from recognized to known.</a:t>
-            </a:r>
-          </a:p>
-          <a:p/>
-          <a:p>
-            <a:r>
-              <a:t>The reference link at the end of each slide's notes is deliberate. Almost all of them go to learn.microsoft.com, and they are the pages I would send you to anyway. The parallel programming landing page, the thread safe collections guide and the channels overview between them cover most of Day 2, and they are maintained by the people who ship the runtime.</a:t>
-            </a:r>
-          </a:p>
-          <a:p/>
-          <a:p>
-            <a:r>
-              <a:t>If you want the long form version of either day, I teach both halves of this material on Dometrain. From Zero to Hero: Asynchronous Programming in C# covers Day 1 at a slower pace, and From Zero to Hero: Parallel Programming in C# does the same for Day 2. They are a reasonable next step when you want the repetitions without the room.</a:t>
-            </a:r>
-          </a:p>
-          <a:p/>
-          <a:p>
-            <a:r>
-              <a:t>https://github.com/TheCodeTraveler/BecomeAnExpertWithAsyncAwait</a:t>
-            </a:r>
-          </a:p>
-          <a:p>
-            <a:r>
-              <a:t>https://dometrain.com/course/from-zero-to-hero-parallel-programming-in-csharp/</a:t>
+              <a:rPr lang="en-US" sz="400">
+                <a:gradFill>
+                  <a:gsLst>
+                    <a:gs pos="0">
+                      <a:prstClr val="black"/>
+                    </a:gs>
+                    <a:gs pos="100000">
+                      <a:prstClr val="black"/>
+                    </a:gs>
+                  </a:gsLst>
+                  <a:lin ang="5400000" scaled="0"/>
+                </a:gradFill>
+                <a:latin typeface="Segoe UI" pitchFamily="34" charset="0"/>
+                <a:ea typeface="Segoe UI" pitchFamily="34" charset="0"/>
+                <a:cs typeface="Segoe UI" pitchFamily="34" charset="0"/>
+              </a:rPr>
+              <a:t>© Microsoft Corporation. All rights reserved. MICROSOFT MAKES NO WARRANTIES, EXPRESS, IMPLIED OR STATUTORY, AS TO THE INFORMATION IN THIS PRESENTATION.</a:t>
             </a:r>
           </a:p>
         </p:txBody>
       </p:sp>
       <p:sp>
         <p:nvSpPr>
-          <p:cNvPr id="4" name="Slide Number Placeholder 3"/>
+          <p:cNvPr id="6" name="Date Placeholder 5">
+            <a:extLst>
+              <a:ext uri="{FF2B5EF4-FFF2-40B4-BE49-F238E27FC236}">
+                <a16:creationId xmlns:a16="http://schemas.microsoft.com/office/drawing/2014/main" id="{3905DAE9-6249-0E40-9EFA-3BB9F24815AF}"/>
+              </a:ext>
+            </a:extLst>
+          </p:cNvPr>
           <p:cNvSpPr>
             <a:spLocks noGrp="1"/>
           </p:cNvSpPr>
           <p:nvPr>
-            <p:ph type="sldNum" idx="5" sz="quarter"/>
-          </p:nvPr>
-        </p:nvSpPr>
-        <p:spPr/>
-      </p:sp>
-    </p:spTree>
-  </p:cSld>
-  <p:clrMapOvr>
-    <a:masterClrMapping/>
-  </p:clrMapOvr>
-</p:notes>
-</file>
-
-<file path=ppt/notesSlides/notesSlide17.xml><?xml version="1.0" encoding="utf-8"?>
-<p:notes xmlns:a="http://schemas.openxmlformats.org/drawingml/2006/main" xmlns:p="http://schemas.openxmlformats.org/presentationml/2006/main" xmlns:r="http://schemas.openxmlformats.org/officeDocument/2006/relationships">
-  <p:cSld>
-    <p:spTree>
-      <p:nvGrpSpPr>
-        <p:cNvPr id="1" name=""/>
-        <p:cNvGrpSpPr/>
-        <p:nvPr/>
-      </p:nvGrpSpPr>
-      <p:grpSpPr>
-        <a:xfrm>
-          <a:off x="0" y="0"/>
-          <a:ext cx="0" cy="0"/>
-          <a:chOff x="0" y="0"/>
-          <a:chExt cx="0" cy="0"/>
-        </a:xfrm>
-      </p:grpSpPr>
-      <p:sp>
-        <p:nvSpPr>
-          <p:cNvPr id="2" name="Slide Image Placeholder 1"/>
-          <p:cNvSpPr>
-            <a:spLocks noGrp="1"/>
-          </p:cNvSpPr>
-          <p:nvPr>
-            <p:ph type="sldImg" idx="2"/>
-          </p:nvPr>
-        </p:nvSpPr>
-        <p:spPr/>
-      </p:sp>
-      <p:sp>
-        <p:nvSpPr>
-          <p:cNvPr id="3" name="Notes Placeholder 2"/>
-          <p:cNvSpPr>
-            <a:spLocks noGrp="1"/>
-          </p:cNvSpPr>
-          <p:nvPr>
-            <p:ph type="body" idx="3" sz="quarter"/>
+            <p:ph type="dt" idx="1"/>
           </p:nvPr>
         </p:nvSpPr>
         <p:spPr/>
@@ -1224,109 +1086,28 @@
           <a:bodyPr/>
           <a:lstStyle/>
           <a:p>
-            <a:r>
-              <a:t>One slide about what I do, and then we are finished.</a:t>
-            </a:r>
-          </a:p>
-          <a:p/>
-          <a:p>
-            <a:r>
-              <a:t>Code Traveler, LLC is my company, and there are two kinds of work I take on.</a:t>
-            </a:r>
-          </a:p>
-          <a:p/>
-          <a:p>
-            <a:r>
-              <a:t>The first is .NET consulting. It is usually this material applied to a codebase that is already in production: a race condition nobody can reproduce, a request path that blocks a thread pool thread, a nightly job that is slower than it should be, an async refactor that stalled halfway through. Sometimes that is a code review, sometimes it is a design review before the code exists, and sometimes it is running these two days for a team that could not all be in this room.</a:t>
-            </a:r>
-          </a:p>
-          <a:p/>
-          <a:p>
-            <a:r>
-              <a:t>The second is Developer Advocacy consulting. If your company has a developer product and is trying to build a DevRel practice, or has one that is not paying off, I help with the parts that decide whether it works: what to publish, which samples are worth maintaining, how docs and talks and community programs fit together, and how to tell whether any of it is landing.</a:t>
-            </a:r>
-          </a:p>
-          <a:p/>
-          <a:p>
-            <a:r>
-              <a:t>If either of those sounds like a problem you have, the next step is a conversation rather than a proposal. Send me a note describing what is going wrong and we will work out whether I am useful to you. If I am not the right person for it, I will usually know who is.</a:t>
-            </a:r>
-          </a:p>
-          <a:p/>
-          <a:p>
-            <a:r>
-              <a:t>[contact email]</a:t>
-            </a:r>
-          </a:p>
-          <a:p>
-            <a:r>
-              <a:t>[website]</a:t>
-            </a:r>
-          </a:p>
-          <a:p>
-            <a:r>
-              <a:t>[LinkedIn]</a:t>
-            </a:r>
+            <a:fld id="{D18B56EA-E28F-4F92-9F16-7A6F2501B303}" type="datetime8">
+              <a:rPr lang="en-US" smtClean="0"/>
+              <a:t>9/14/26 8:08 PM</a:t>
+            </a:fld>
+            <a:endParaRPr lang="en-US"/>
           </a:p>
         </p:txBody>
       </p:sp>
       <p:sp>
         <p:nvSpPr>
-          <p:cNvPr id="4" name="Slide Number Placeholder 3"/>
+          <p:cNvPr id="7" name="Slide Number Placeholder 6">
+            <a:extLst>
+              <a:ext uri="{FF2B5EF4-FFF2-40B4-BE49-F238E27FC236}">
+                <a16:creationId xmlns:a16="http://schemas.microsoft.com/office/drawing/2014/main" id="{E967A9DA-E538-E4CC-7551-F7C89A919E9F}"/>
+              </a:ext>
+            </a:extLst>
+          </p:cNvPr>
           <p:cNvSpPr>
             <a:spLocks noGrp="1"/>
           </p:cNvSpPr>
           <p:nvPr>
-            <p:ph type="sldNum" idx="5" sz="quarter"/>
-          </p:nvPr>
-        </p:nvSpPr>
-        <p:spPr/>
-      </p:sp>
-    </p:spTree>
-  </p:cSld>
-  <p:clrMapOvr>
-    <a:masterClrMapping/>
-  </p:clrMapOvr>
-</p:notes>
-</file>
-
-<file path=ppt/notesSlides/notesSlide18.xml><?xml version="1.0" encoding="utf-8"?>
-<p:notes xmlns:a="http://schemas.openxmlformats.org/drawingml/2006/main" xmlns:p="http://schemas.openxmlformats.org/presentationml/2006/main" xmlns:r="http://schemas.openxmlformats.org/officeDocument/2006/relationships">
-  <p:cSld>
-    <p:spTree>
-      <p:nvGrpSpPr>
-        <p:cNvPr id="1" name=""/>
-        <p:cNvGrpSpPr/>
-        <p:nvPr/>
-      </p:nvGrpSpPr>
-      <p:grpSpPr>
-        <a:xfrm>
-          <a:off x="0" y="0"/>
-          <a:ext cx="0" cy="0"/>
-          <a:chOff x="0" y="0"/>
-          <a:chExt cx="0" cy="0"/>
-        </a:xfrm>
-      </p:grpSpPr>
-      <p:sp>
-        <p:nvSpPr>
-          <p:cNvPr id="2" name="Slide Image Placeholder 1"/>
-          <p:cNvSpPr>
-            <a:spLocks noGrp="1"/>
-          </p:cNvSpPr>
-          <p:nvPr>
-            <p:ph type="sldImg" idx="2"/>
-          </p:nvPr>
-        </p:nvSpPr>
-        <p:spPr/>
-      </p:sp>
-      <p:sp>
-        <p:nvSpPr>
-          <p:cNvPr id="3" name="Notes Placeholder 2"/>
-          <p:cNvSpPr>
-            <a:spLocks noGrp="1"/>
-          </p:cNvSpPr>
-          <p:nvPr>
-            <p:ph type="body" idx="3" sz="quarter"/>
+            <p:ph type="sldNum" sz="quarter" idx="5"/>
           </p:nvPr>
         </p:nvSpPr>
         <p:spPr/>
@@ -1334,67 +1115,21 @@
           <a:bodyPr/>
           <a:lstStyle/>
           <a:p>
-            <a:r>
-              <a:t>That is the workshop. Thank you for two days of it.</a:t>
-            </a:r>
-          </a:p>
-          <a:p/>
-          <a:p>
-            <a:r>
-              <a:t>You came in able to write async code that worked. You are leaving able to explain why it works, which is a different skill and a far more durable one. You watched the compiler rewrite a method into a state machine, you built a Task from scratch and taught the await keyword to accept it, you found race conditions that a single user test will never catch, you made a parallel loop that was quietly doing nothing do all of its work, and you replaced a polling loop with a channel.</a:t>
-            </a:r>
-          </a:p>
-          <a:p/>
-          <a:p>
-            <a:r>
-              <a:t>Two things before you go.</a:t>
-            </a:r>
-          </a:p>
-          <a:p/>
-          <a:p>
-            <a:r>
-              <a:t>First, the repo is yours. These notes are in it, so the explanations are readable later, when the context has faded and the bug is real and nobody is standing at a whiteboard.</a:t>
-            </a:r>
-          </a:p>
-          <a:p/>
-          <a:p>
-            <a:r>
-              <a:t>Second, go break something on purpose. The fastest way to keep this is to take one real thing at work next week, a loop, a cache, an endpoint that blocks, and put what you learned against it while the material is still fresh. Then run it under load five times rather than once, because a race condition that passes once has not been fixed, it has been lucky. The load is not the bug. The load is the test.</a:t>
-            </a:r>
-          </a:p>
-          <a:p/>
-          <a:p>
-            <a:r>
-              <a:t>Questions now, while everybody is still in the room, and my inbox is open long after that.</a:t>
-            </a:r>
-          </a:p>
-          <a:p/>
-          <a:p>
-            <a:r>
-              <a:t>Thank you. Go write something fast and correct.</a:t>
-            </a:r>
-          </a:p>
-          <a:p/>
-          <a:p>
-            <a:r>
-              <a:t>[contact email]</a:t>
-            </a:r>
+            <a:fld id="{B4008EB6-D09E-4580-8CD6-DDB14511944F}" type="slidenum">
+              <a:rPr lang="en-US" smtClean="0"/>
+              <a:pPr/>
+              <a:t>2</a:t>
+            </a:fld>
+            <a:endParaRPr lang="en-US"/>
           </a:p>
         </p:txBody>
       </p:sp>
-      <p:sp>
-        <p:nvSpPr>
-          <p:cNvPr id="4" name="Slide Number Placeholder 3"/>
-          <p:cNvSpPr>
-            <a:spLocks noGrp="1"/>
-          </p:cNvSpPr>
-          <p:nvPr>
-            <p:ph type="sldNum" idx="5" sz="quarter"/>
-          </p:nvPr>
-        </p:nvSpPr>
-        <p:spPr/>
-      </p:sp>
     </p:spTree>
+    <p:extLst>
+      <p:ext uri="{BB962C8B-B14F-4D97-AF65-F5344CB8AC3E}">
+        <p14:creationId xmlns:p14="http://schemas.microsoft.com/office/powerpoint/2010/main" val="1051895892"/>
+      </p:ext>
+    </p:extLst>
   </p:cSld>
   <p:clrMapOvr>
     <a:masterClrMapping/>
@@ -3160,245 +2895,6 @@
   </p:cSld>
   <p:clrMapOvr>
     <a:overrideClrMapping bg1="dk1" tx1="lt1" bg2="dk2" tx2="lt2" accent1="accent1" accent2="accent2" accent3="accent3" accent4="accent4" accent5="accent5" accent6="accent6" hlink="hlink" folHlink="folHlink"/>
-  </p:clrMapOvr>
-  <mc:AlternateContent xmlns:mc="http://schemas.openxmlformats.org/markup-compatibility/2006" xmlns:p14="http://schemas.microsoft.com/office/powerpoint/2010/main">
-    <mc:Choice Requires="p14">
-      <p:transition spd="med" p14:dur="700">
-        <p:fade/>
-      </p:transition>
-    </mc:Choice>
-    <mc:Fallback xmlns="">
-      <p:transition spd="med">
-        <p:fade/>
-      </p:transition>
-    </mc:Fallback>
-  </mc:AlternateContent>
-</p:sldLayout>
-</file>
-
-<file path=ppt/slideLayouts/slideLayout17.xml><?xml version="1.0" encoding="utf-8"?>
-<p:sldLayout xmlns:a="http://schemas.openxmlformats.org/drawingml/2006/main" xmlns:r="http://schemas.openxmlformats.org/officeDocument/2006/relationships" xmlns:p="http://schemas.openxmlformats.org/presentationml/2006/main" userDrawn="1">
-  <p:cSld name="Title and Content">
-    <p:spTree>
-      <p:nvGrpSpPr>
-        <p:cNvPr id="1" name=""/>
-        <p:cNvGrpSpPr/>
-        <p:nvPr/>
-      </p:nvGrpSpPr>
-      <p:grpSpPr>
-        <a:xfrm>
-          <a:off x="0" y="0"/>
-          <a:ext cx="0" cy="0"/>
-          <a:chOff x="0" y="0"/>
-          <a:chExt cx="0" cy="0"/>
-        </a:xfrm>
-      </p:grpSpPr>
-      <p:sp>
-        <p:nvSpPr>
-          <p:cNvPr id="6" name="Title 5"/>
-          <p:cNvSpPr>
-            <a:spLocks noGrp="1"/>
-          </p:cNvSpPr>
-          <p:nvPr>
-            <p:ph type="title"/>
-          </p:nvPr>
-        </p:nvSpPr>
-        <p:spPr/>
-        <p:txBody>
-          <a:bodyPr/>
-          <a:lstStyle/>
-          <a:p>
-            <a:r>
-              <a:rPr lang="en-US"/>
-              <a:t>Click to edit Master title style</a:t>
-            </a:r>
-          </a:p>
-        </p:txBody>
-      </p:sp>
-      <p:sp>
-        <p:nvSpPr>
-          <p:cNvPr id="3" name="Text Placeholder 2"/>
-          <p:cNvSpPr>
-            <a:spLocks noGrp="1"/>
-          </p:cNvSpPr>
-          <p:nvPr>
-            <p:ph type="body" sz="quarter" idx="10"/>
-          </p:nvPr>
-        </p:nvSpPr>
-        <p:spPr>
-          <a:xfrm>
-            <a:off x="274702" y="1211287"/>
-            <a:ext cx="11888787" cy="5484813"/>
-          </a:xfrm>
-        </p:spPr>
-        <p:txBody>
-          <a:bodyPr/>
-          <a:lstStyle/>
-          <a:p>
-            <a:pPr lvl="0"/>
-            <a:r>
-              <a:rPr lang="en-US"/>
-              <a:t>Edit Master text styles</a:t>
-            </a:r>
-          </a:p>
-          <a:p>
-            <a:pPr lvl="1"/>
-            <a:r>
-              <a:rPr lang="en-US"/>
-              <a:t>Second level</a:t>
-            </a:r>
-          </a:p>
-          <a:p>
-            <a:pPr lvl="2"/>
-            <a:r>
-              <a:rPr lang="en-US"/>
-              <a:t>Third level</a:t>
-            </a:r>
-          </a:p>
-          <a:p>
-            <a:pPr lvl="3"/>
-            <a:r>
-              <a:rPr lang="en-US"/>
-              <a:t>Fourth level</a:t>
-            </a:r>
-          </a:p>
-          <a:p>
-            <a:pPr lvl="4"/>
-            <a:r>
-              <a:rPr lang="en-US"/>
-              <a:t>Fifth level</a:t>
-            </a:r>
-          </a:p>
-        </p:txBody>
-      </p:sp>
-      <p:grpSp>
-        <p:nvGrpSpPr>
-          <p:cNvPr id="2" name="Group 1">
-            <a:extLst>
-              <a:ext uri="{FF2B5EF4-FFF2-40B4-BE49-F238E27FC236}">
-                <a16:creationId xmlns:a16="http://schemas.microsoft.com/office/drawing/2014/main" id="{FCAC3703-D666-2110-E9D1-7FCF46F0DE3B}"/>
-              </a:ext>
-            </a:extLst>
-          </p:cNvPr>
-          <p:cNvGrpSpPr/>
-          <p:nvPr userDrawn="1"/>
-        </p:nvGrpSpPr>
-        <p:grpSpPr>
-          <a:xfrm>
-            <a:off x="274701" y="6364816"/>
-            <a:ext cx="2167492" cy="353943"/>
-            <a:chOff x="8703664" y="6310423"/>
-            <a:chExt cx="2273864" cy="360989"/>
-          </a:xfrm>
-        </p:grpSpPr>
-        <p:pic>
-          <p:nvPicPr>
-            <p:cNvPr id="4" name="Picture 3">
-              <a:extLst>
-                <a:ext uri="{FF2B5EF4-FFF2-40B4-BE49-F238E27FC236}">
-                  <a16:creationId xmlns:a16="http://schemas.microsoft.com/office/drawing/2014/main" id="{B7C4ABC9-C4D6-329B-4FB4-6A455A08C937}"/>
-                </a:ext>
-              </a:extLst>
-            </p:cNvPr>
-            <p:cNvPicPr>
-              <a:picLocks noChangeAspect="1"/>
-            </p:cNvPicPr>
-            <p:nvPr userDrawn="1"/>
-          </p:nvPicPr>
-          <p:blipFill>
-            <a:blip r:embed="rId2"/>
-            <a:srcRect/>
-            <a:stretch/>
-          </p:blipFill>
-          <p:spPr>
-            <a:xfrm>
-              <a:off x="10600392" y="6337020"/>
-              <a:ext cx="377136" cy="323942"/>
-            </a:xfrm>
-            <a:prstGeom prst="rect">
-              <a:avLst/>
-            </a:prstGeom>
-          </p:spPr>
-        </p:pic>
-        <p:sp>
-          <p:nvSpPr>
-            <p:cNvPr id="7" name="TextBox 6">
-              <a:extLst>
-                <a:ext uri="{FF2B5EF4-FFF2-40B4-BE49-F238E27FC236}">
-                  <a16:creationId xmlns:a16="http://schemas.microsoft.com/office/drawing/2014/main" id="{854ED717-4B20-3E1C-5F9D-BE7169CC403A}"/>
-                </a:ext>
-              </a:extLst>
-            </p:cNvPr>
-            <p:cNvSpPr txBox="1"/>
-            <p:nvPr userDrawn="1"/>
-          </p:nvSpPr>
-          <p:spPr>
-            <a:xfrm>
-              <a:off x="8703664" y="6310423"/>
-              <a:ext cx="2080020" cy="360989"/>
-            </a:xfrm>
-            <a:prstGeom prst="rect">
-              <a:avLst/>
-            </a:prstGeom>
-            <a:noFill/>
-          </p:spPr>
-          <p:txBody>
-            <a:bodyPr wrap="square" rtlCol="0">
-              <a:spAutoFit/>
-            </a:bodyPr>
-            <a:lstStyle/>
-            <a:p>
-              <a:pPr marL="0" marR="0" lvl="0" indent="0" algn="l" defTabSz="896386" rtl="0" eaLnBrk="1" fontAlgn="auto" latinLnBrk="0" hangingPunct="1">
-                <a:lnSpc>
-                  <a:spcPct val="100000"/>
-                </a:lnSpc>
-                <a:spcBef>
-                  <a:spcPts val="0"/>
-                </a:spcBef>
-                <a:spcAft>
-                  <a:spcPts val="0"/>
-                </a:spcAft>
-                <a:buClrTx/>
-                <a:buSzTx/>
-                <a:buFontTx/>
-                <a:buNone/>
-                <a:tabLst/>
-                <a:defRPr/>
-              </a:pPr>
-              <a:r>
-                <a:rPr lang="en-US" sz="1700" dirty="0">
-                  <a:solidFill>
-                    <a:schemeClr val="tx1"/>
-                  </a:solidFill>
-                </a:rPr>
-                <a:t>@</a:t>
-              </a:r>
-              <a:r>
-                <a:rPr lang="en-US" sz="1700" dirty="0" err="1">
-                  <a:solidFill>
-                    <a:schemeClr val="tx1"/>
-                  </a:solidFill>
-                </a:rPr>
-                <a:t>CodeTraveler.io</a:t>
-              </a:r>
-              <a:endParaRPr lang="en-US" sz="1700" dirty="0">
-                <a:solidFill>
-                  <a:schemeClr val="tx1"/>
-                </a:solidFill>
-              </a:endParaRPr>
-            </a:p>
-          </p:txBody>
-        </p:sp>
-      </p:grpSp>
-    </p:spTree>
-    <p:extLst>
-      <p:ext uri="{BB962C8B-B14F-4D97-AF65-F5344CB8AC3E}">
-        <p14:creationId xmlns:p14="http://schemas.microsoft.com/office/powerpoint/2010/main" val="2326604894"/>
-      </p:ext>
-    </p:extLst>
-  </p:cSld>
-  <p:clrMapOvr>
-    <a:masterClrMapping/>
   </p:clrMapOvr>
   <mc:AlternateContent xmlns:mc="http://schemas.openxmlformats.org/markup-compatibility/2006" xmlns:p14="http://schemas.microsoft.com/office/powerpoint/2010/main">
     <mc:Choice Requires="p14">
@@ -6841,7 +6337,7 @@
           <p:nvPr userDrawn="1"/>
         </p:nvPicPr>
         <p:blipFill>
-          <a:blip r:embed="rId9"/>
+          <a:blip r:embed="rId8"/>
           <a:stretch>
             <a:fillRect/>
           </a:stretch>
@@ -6871,7 +6367,6 @@
     <p:sldLayoutId id="2147484517" r:id="rId4"/>
     <p:sldLayoutId id="2147484518" r:id="rId5"/>
     <p:sldLayoutId id="2147484519" r:id="rId6"/>
-    <p:sldLayoutId id="2147484530" r:id="rId7"/>
   </p:sldLayoutIdLst>
   <mc:AlternateContent xmlns:mc="http://schemas.openxmlformats.org/markup-compatibility/2006" xmlns:p14="http://schemas.microsoft.com/office/powerpoint/2010/main">
     <mc:Choice Requires="p14">
@@ -7374,8 +6869,8 @@
 </p:sldMaster>
 </file>
 
-<file path=ppt/slides/slide13.xml><?xml version="1.0" encoding="utf-8"?>
-<p:sld xmlns:a="http://schemas.openxmlformats.org/drawingml/2006/main" xmlns:p="http://schemas.openxmlformats.org/presentationml/2006/main" xmlns:r="http://schemas.openxmlformats.org/officeDocument/2006/relationships">
+<file path=ppt/slides/slide1.xml><?xml version="1.0" encoding="utf-8"?>
+<p:sld xmlns:a="http://schemas.openxmlformats.org/drawingml/2006/main" xmlns:r="http://schemas.openxmlformats.org/officeDocument/2006/relationships" xmlns:p="http://schemas.openxmlformats.org/presentationml/2006/main">
   <p:cSld>
     <p:spTree>
       <p:nvGrpSpPr>
@@ -7383,10 +6878,23 @@
         <p:cNvGrpSpPr/>
         <p:nvPr/>
       </p:nvGrpSpPr>
-      <p:grpSpPr/>
+      <p:grpSpPr>
+        <a:xfrm>
+          <a:off x="0" y="0"/>
+          <a:ext cx="0" cy="0"/>
+          <a:chOff x="0" y="0"/>
+          <a:chExt cx="0" cy="0"/>
+        </a:xfrm>
+      </p:grpSpPr>
       <p:sp>
         <p:nvSpPr>
-          <p:cNvPr id="2" name="Title 1"/>
+          <p:cNvPr id="2" name="Title 1">
+            <a:extLst>
+              <a:ext uri="{FF2B5EF4-FFF2-40B4-BE49-F238E27FC236}">
+                <a16:creationId xmlns:a16="http://schemas.microsoft.com/office/drawing/2014/main" id="{C630DCAD-A6C0-47CD-8E65-3ED091E5094A}"/>
+              </a:ext>
+            </a:extLst>
+          </p:cNvPr>
           <p:cNvSpPr>
             <a:spLocks noGrp="1"/>
           </p:cNvSpPr>
@@ -7401,13 +6909,13 @@
           <a:p>
             <a:r>
               <a:rPr lang="en-US" dirty="0"/>
-              <a:t>Day 1 Recap</a:t>
+              <a:t>Async/Await Online Courses </a:t>
             </a:r>
             <a:br>
               <a:rPr lang="en-US" dirty="0"/>
             </a:br>
             <a:r>
-              <a:rPr lang="en-US" sz="3200" dirty="0">
+              <a:rPr lang="en-US" sz="3600">
                 <a:gradFill>
                   <a:gsLst>
                     <a:gs pos="1250">
@@ -7420,82 +6928,94 @@
                   <a:lin ang="5400000" scaled="0"/>
                 </a:gradFill>
               </a:rPr>
-              <a:t>What the Compiler and the Runtime Do for You</a:t>
+              <a:t>Dometrain</a:t>
             </a:r>
-            <a:endParaRPr lang="en-US" sz="4000" dirty="0">
-              <a:gradFill>
-                <a:gsLst>
-                  <a:gs pos="1250">
-                    <a:srgbClr val="FFB900"/>
-                  </a:gs>
-                  <a:gs pos="100000">
-                    <a:srgbClr val="FFB900"/>
-                  </a:gs>
-                </a:gsLst>
-                <a:lin ang="5400000" scaled="0"/>
-              </a:gradFill>
-            </a:endParaRPr>
+            <a:r>
+              <a:rPr lang="en-US" sz="3600" dirty="0" err="1">
+                <a:gradFill>
+                  <a:gsLst>
+                    <a:gs pos="1250">
+                      <a:srgbClr val="FFB900"/>
+                    </a:gs>
+                    <a:gs pos="100000">
+                      <a:srgbClr val="FFB900"/>
+                    </a:gs>
+                  </a:gsLst>
+                  <a:lin ang="5400000" scaled="0"/>
+                </a:gradFill>
+              </a:rPr>
+              <a:t>.com</a:t>
+            </a:r>
+            <a:endParaRPr lang="en-US" dirty="0"/>
           </a:p>
         </p:txBody>
       </p:sp>
-      <p:sp>
-        <p:nvSpPr>
-          <p:cNvPr id="3" name="Text Placeholder 2"/>
-          <p:cNvSpPr>
-            <a:spLocks noGrp="1"/>
-          </p:cNvSpPr>
-          <p:nvPr>
-            <p:ph type="body" idx="10" sz="quarter"/>
-          </p:nvPr>
-        </p:nvSpPr>
+      <p:pic>
+        <p:nvPicPr>
+          <p:cNvPr id="4" name="Picture 3">
+            <a:extLst>
+              <a:ext uri="{FF2B5EF4-FFF2-40B4-BE49-F238E27FC236}">
+                <a16:creationId xmlns:a16="http://schemas.microsoft.com/office/drawing/2014/main" id="{2CC7F4B5-35B2-2562-56DE-971F054DA2F8}"/>
+              </a:ext>
+            </a:extLst>
+          </p:cNvPr>
+          <p:cNvPicPr>
+            <a:picLocks noChangeAspect="1"/>
+          </p:cNvPicPr>
+          <p:nvPr/>
+        </p:nvPicPr>
+        <p:blipFill>
+          <a:blip r:embed="rId3"/>
+          <a:stretch>
+            <a:fillRect/>
+          </a:stretch>
+        </p:blipFill>
         <p:spPr>
           <a:xfrm>
-            <a:off x="274320" y="1627632"/>
-            <a:ext cx="11887200" cy="3594830"/>
+            <a:off x="6401900" y="1889247"/>
+            <a:ext cx="5860928" cy="3974442"/>
           </a:xfrm>
+          <a:prstGeom prst="rect">
+            <a:avLst/>
+          </a:prstGeom>
         </p:spPr>
-        <p:txBody>
-          <a:bodyPr/>
-          <a:lstStyle/>
-          <a:p>
-            <a:r>
-              <a:rPr lang="en-US" dirty="0"/>
-              <a:t>Task is not a thread: it is a promise that tracks completion</a:t>
-            </a:r>
-          </a:p>
-          <a:p>
-            <a:r>
-              <a:rPr lang="en-US" dirty="0"/>
-              <a:t>await is just a pattern: any type with GetAwaiter() can be awaited</a:t>
-            </a:r>
-          </a:p>
-          <a:p>
-            <a:r>
-              <a:rPr lang="en-US" dirty="0"/>
-              <a:t>The ExecutionContext flows across an await. The SynchronizationContext is captured separately.</a:t>
-            </a:r>
-          </a:p>
-          <a:p>
-            <a:r>
-              <a:rPr lang="en-US" dirty="0"/>
-              <a:t>await every Task, forward every CancellationToken</a:t>
-            </a:r>
-          </a:p>
-          <a:p>
-            <a:r>
-              <a:rPr lang="en-US" dirty="0"/>
-              <a:t>Never .Wait() or .Result</a:t>
-            </a:r>
-          </a:p>
-          <a:p>
-            <a:r>
-              <a:rPr lang="en-US" dirty="0"/>
-              <a:t>Runtime Async changes the machinery, not the guidance</a:t>
-            </a:r>
-          </a:p>
-        </p:txBody>
-      </p:sp>
+      </p:pic>
+      <p:pic>
+        <p:nvPicPr>
+          <p:cNvPr id="7" name="Picture 6">
+            <a:extLst>
+              <a:ext uri="{FF2B5EF4-FFF2-40B4-BE49-F238E27FC236}">
+                <a16:creationId xmlns:a16="http://schemas.microsoft.com/office/drawing/2014/main" id="{F9CBA173-81F7-6417-DE84-83998CBE59DA}"/>
+              </a:ext>
+            </a:extLst>
+          </p:cNvPr>
+          <p:cNvPicPr>
+            <a:picLocks noChangeAspect="1"/>
+          </p:cNvPicPr>
+          <p:nvPr/>
+        </p:nvPicPr>
+        <p:blipFill>
+          <a:blip r:embed="rId4"/>
+          <a:stretch>
+            <a:fillRect/>
+          </a:stretch>
+        </p:blipFill>
+        <p:spPr>
+          <a:xfrm>
+            <a:off x="274639" y="1889247"/>
+            <a:ext cx="5943598" cy="3974442"/>
+          </a:xfrm>
+          <a:prstGeom prst="rect">
+            <a:avLst/>
+          </a:prstGeom>
+        </p:spPr>
+      </p:pic>
     </p:spTree>
+    <p:extLst>
+      <p:ext uri="{BB962C8B-B14F-4D97-AF65-F5344CB8AC3E}">
+        <p14:creationId xmlns:p14="http://schemas.microsoft.com/office/powerpoint/2010/main" val="872841419"/>
+      </p:ext>
+    </p:extLst>
   </p:cSld>
   <p:clrMapOvr>
     <a:masterClrMapping/>
@@ -7515,19 +7035,38 @@
 </p:sld>
 </file>
 
-<file path=ppt/slides/slide14.xml><?xml version="1.0" encoding="utf-8"?>
-<p:sld xmlns:a="http://schemas.openxmlformats.org/drawingml/2006/main" xmlns:p="http://schemas.openxmlformats.org/presentationml/2006/main" xmlns:r="http://schemas.openxmlformats.org/officeDocument/2006/relationships">
+<file path=ppt/slides/slide2.xml><?xml version="1.0" encoding="utf-8"?>
+<p:sld xmlns:a="http://schemas.openxmlformats.org/drawingml/2006/main" xmlns:r="http://schemas.openxmlformats.org/officeDocument/2006/relationships" xmlns:p="http://schemas.openxmlformats.org/presentationml/2006/main">
   <p:cSld>
     <p:spTree>
       <p:nvGrpSpPr>
-        <p:cNvPr id="1" name=""/>
+        <p:cNvPr id="1" name="">
+          <a:extLst>
+            <a:ext uri="{FF2B5EF4-FFF2-40B4-BE49-F238E27FC236}">
+              <a16:creationId xmlns:a16="http://schemas.microsoft.com/office/drawing/2014/main" id="{CAA00628-4C97-435F-8278-A86EEFA6121F}"/>
+            </a:ext>
+          </a:extLst>
+        </p:cNvPr>
         <p:cNvGrpSpPr/>
         <p:nvPr/>
       </p:nvGrpSpPr>
-      <p:grpSpPr/>
+      <p:grpSpPr>
+        <a:xfrm>
+          <a:off x="0" y="0"/>
+          <a:ext cx="0" cy="0"/>
+          <a:chOff x="0" y="0"/>
+          <a:chExt cx="0" cy="0"/>
+        </a:xfrm>
+      </p:grpSpPr>
       <p:sp>
         <p:nvSpPr>
-          <p:cNvPr id="2" name="Title 1"/>
+          <p:cNvPr id="2" name="Title 1">
+            <a:extLst>
+              <a:ext uri="{FF2B5EF4-FFF2-40B4-BE49-F238E27FC236}">
+                <a16:creationId xmlns:a16="http://schemas.microsoft.com/office/drawing/2014/main" id="{31ABAC10-4AAD-D524-D100-53D04E25DF65}"/>
+              </a:ext>
+            </a:extLst>
+          </p:cNvPr>
           <p:cNvSpPr>
             <a:spLocks noGrp="1"/>
           </p:cNvSpPr>
@@ -7542,13 +7081,13 @@
           <a:p>
             <a:r>
               <a:rPr lang="en-US" dirty="0"/>
-              <a:t>Day 2 Recap</a:t>
+              <a:t>.NET MAUI Online Courses </a:t>
             </a:r>
             <a:br>
               <a:rPr lang="en-US" dirty="0"/>
             </a:br>
             <a:r>
-              <a:rPr lang="en-US" sz="3200" dirty="0">
+              <a:rPr lang="en-US" sz="3600" dirty="0" err="1">
                 <a:gradFill>
                   <a:gsLst>
                     <a:gs pos="1250">
@@ -7561,610 +7100,78 @@
                   <a:lin ang="5400000" scaled="0"/>
                 </a:gradFill>
               </a:rPr>
-              <a:t>Waiting Is Not Working</a:t>
+              <a:t>Dometrain.com</a:t>
             </a:r>
-            <a:endParaRPr lang="en-US" sz="4000" dirty="0">
-              <a:gradFill>
-                <a:gsLst>
-                  <a:gs pos="1250">
-                    <a:srgbClr val="FFB900"/>
-                  </a:gs>
-                  <a:gs pos="100000">
-                    <a:srgbClr val="FFB900"/>
-                  </a:gs>
-                </a:gsLst>
-                <a:lin ang="5400000" scaled="0"/>
-              </a:gradFill>
-            </a:endParaRPr>
+            <a:endParaRPr lang="en-US" dirty="0"/>
           </a:p>
         </p:txBody>
       </p:sp>
-      <p:sp>
-        <p:nvSpPr>
-          <p:cNvPr id="3" name="Text Placeholder 2"/>
-          <p:cNvSpPr>
-            <a:spLocks noGrp="1"/>
-          </p:cNvSpPr>
-          <p:nvPr>
-            <p:ph type="body" idx="10" sz="quarter"/>
-          </p:nvPr>
-        </p:nvSpPr>
+      <p:pic>
+        <p:nvPicPr>
+          <p:cNvPr id="5" name="Picture 4">
+            <a:extLst>
+              <a:ext uri="{FF2B5EF4-FFF2-40B4-BE49-F238E27FC236}">
+                <a16:creationId xmlns:a16="http://schemas.microsoft.com/office/drawing/2014/main" id="{10909FAA-FBEA-7463-6A6A-792200F5D0A3}"/>
+              </a:ext>
+            </a:extLst>
+          </p:cNvPr>
+          <p:cNvPicPr>
+            <a:picLocks noChangeAspect="1"/>
+          </p:cNvPicPr>
+          <p:nvPr/>
+        </p:nvPicPr>
+        <p:blipFill>
+          <a:blip r:embed="rId3"/>
+          <a:stretch>
+            <a:fillRect/>
+          </a:stretch>
+        </p:blipFill>
         <p:spPr>
           <a:xfrm>
-            <a:off x="274320" y="1627632"/>
-            <a:ext cx="11887200" cy="3594830"/>
+            <a:off x="347042" y="1956653"/>
+            <a:ext cx="5929776" cy="3586272"/>
           </a:xfrm>
+          <a:prstGeom prst="rect">
+            <a:avLst/>
+          </a:prstGeom>
         </p:spPr>
-        <p:txBody>
-          <a:bodyPr/>
-          <a:lstStyle/>
-          <a:p>
-            <a:r>
-              <a:rPr lang="en-US" dirty="0"/>
-              <a:t>Asynchronous frees a thread. Parallel adds threads.</a:t>
-            </a:r>
-          </a:p>
-          <a:p>
-            <a:r>
-              <a:rPr lang="en-US" dirty="0"/>
-              <a:t>Start early, await late: calling the method starts the work</a:t>
-            </a:r>
-          </a:p>
-          <a:p>
-            <a:r>
-              <a:rPr lang="en-US" dirty="0"/>
-              <a:t>Parallel.ForEach takes an Action&lt;T&gt;, so an async lambda there is async void</a:t>
-            </a:r>
-          </a:p>
-          <a:p>
-            <a:r>
-              <a:rPr lang="en-US" dirty="0"/>
-              <a:t>Thread safe is not atomic, and two safe calls in a row are still a race</a:t>
-            </a:r>
-          </a:p>
-          <a:p>
-            <a:r>
-              <a:rPr lang="en-US" dirty="0"/>
-              <a:t>ConcurrentQueue&lt;T&gt; is storage. Channel&lt;T&gt; is storage plus coordination.</a:t>
-            </a:r>
-          </a:p>
-        </p:txBody>
-      </p:sp>
-    </p:spTree>
-  </p:cSld>
-  <p:clrMapOvr>
-    <a:masterClrMapping/>
-  </p:clrMapOvr>
-  <mc:AlternateContent xmlns:mc="http://schemas.openxmlformats.org/markup-compatibility/2006" xmlns:p14="http://schemas.microsoft.com/office/powerpoint/2010/main">
-    <mc:Choice Requires="p14">
-      <p:transition spd="med" p14:dur="700">
-        <p:fade/>
-      </p:transition>
-    </mc:Choice>
-    <mc:Fallback xmlns="">
-      <p:transition spd="med">
-        <p:fade/>
-      </p:transition>
-    </mc:Fallback>
-  </mc:AlternateContent>
-</p:sld>
-</file>
-
-<file path=ppt/slides/slide15.xml><?xml version="1.0" encoding="utf-8"?>
-<p:sld xmlns:a="http://schemas.openxmlformats.org/drawingml/2006/main" xmlns:p="http://schemas.openxmlformats.org/presentationml/2006/main" xmlns:r="http://schemas.openxmlformats.org/officeDocument/2006/relationships">
-  <p:cSld>
-    <p:spTree>
-      <p:nvGrpSpPr>
-        <p:cNvPr id="1" name=""/>
-        <p:cNvGrpSpPr/>
-        <p:nvPr/>
-      </p:nvGrpSpPr>
-      <p:grpSpPr/>
-      <p:sp>
-        <p:nvSpPr>
-          <p:cNvPr id="2" name="Title 1"/>
-          <p:cNvSpPr>
-            <a:spLocks noGrp="1"/>
-          </p:cNvSpPr>
-          <p:nvPr>
-            <p:ph type="title"/>
-          </p:nvPr>
-        </p:nvSpPr>
-        <p:spPr/>
-        <p:txBody>
-          <a:bodyPr/>
-          <a:lstStyle/>
-          <a:p>
-            <a:r>
-              <a:rPr lang="en-US" dirty="0"/>
-              <a:t>One Question to Ask</a:t>
-            </a:r>
-            <a:br>
-              <a:rPr lang="en-US" dirty="0"/>
-            </a:br>
-            <a:r>
-              <a:rPr lang="en-US" sz="3200" dirty="0">
-                <a:gradFill>
-                  <a:gsLst>
-                    <a:gs pos="1250">
-                      <a:srgbClr val="FFB900"/>
-                    </a:gs>
-                    <a:gs pos="100000">
-                      <a:srgbClr val="FFB900"/>
-                    </a:gs>
-                  </a:gsLst>
-                  <a:lin ang="5400000" scaled="0"/>
-                </a:gradFill>
-              </a:rPr>
-              <a:t>What Kind of Slow Is It?</a:t>
-            </a:r>
-            <a:endParaRPr lang="en-US" sz="4000" dirty="0">
-              <a:gradFill>
-                <a:gsLst>
-                  <a:gs pos="1250">
-                    <a:srgbClr val="FFB900"/>
-                  </a:gs>
-                  <a:gs pos="100000">
-                    <a:srgbClr val="FFB900"/>
-                  </a:gs>
-                </a:gsLst>
-                <a:lin ang="5400000" scaled="0"/>
-              </a:gradFill>
-            </a:endParaRPr>
-          </a:p>
-        </p:txBody>
-      </p:sp>
-      <p:sp>
-        <p:nvSpPr>
-          <p:cNvPr id="3" name="Text Placeholder 2"/>
-          <p:cNvSpPr>
-            <a:spLocks noGrp="1"/>
-          </p:cNvSpPr>
-          <p:nvPr>
-            <p:ph type="body" idx="10" sz="quarter"/>
-          </p:nvPr>
-        </p:nvSpPr>
+      </p:pic>
+      <p:pic>
+        <p:nvPicPr>
+          <p:cNvPr id="8" name="Picture 7">
+            <a:extLst>
+              <a:ext uri="{FF2B5EF4-FFF2-40B4-BE49-F238E27FC236}">
+                <a16:creationId xmlns:a16="http://schemas.microsoft.com/office/drawing/2014/main" id="{36D8B638-4D69-D4FC-AF13-FEFD2A43ADF3}"/>
+              </a:ext>
+            </a:extLst>
+          </p:cNvPr>
+          <p:cNvPicPr>
+            <a:picLocks noChangeAspect="1"/>
+          </p:cNvPicPr>
+          <p:nvPr/>
+        </p:nvPicPr>
+        <p:blipFill>
+          <a:blip r:embed="rId4"/>
+          <a:stretch>
+            <a:fillRect/>
+          </a:stretch>
+        </p:blipFill>
         <p:spPr>
           <a:xfrm>
-            <a:off x="274320" y="1627632"/>
-            <a:ext cx="11887200" cy="3594830"/>
+            <a:off x="6365031" y="1956652"/>
+            <a:ext cx="5929775" cy="3506302"/>
           </a:xfrm>
+          <a:prstGeom prst="rect">
+            <a:avLst/>
+          </a:prstGeom>
         </p:spPr>
-        <p:txBody>
-          <a:bodyPr/>
-          <a:lstStyle/>
-          <a:p>
-            <a:r>
-              <a:rPr lang="en-US" dirty="0"/>
-              <a:t>Waiting on I/O: await it and give the thread back</a:t>
-            </a:r>
-          </a:p>
-          <a:p>
-            <a:r>
-              <a:rPr lang="en-US" dirty="0"/>
-              <a:t>Genuinely computing: Parallel or PLINQ, bounded by Environment.ProcessorCount</a:t>
-            </a:r>
-          </a:p>
-          <a:p>
-            <a:r>
-              <a:rPr lang="en-US" dirty="0"/>
-              <a:t>Both at once: Parallel.ForEachAsync with a MaxDegreeOfParallelism you can justify</a:t>
-            </a:r>
-          </a:p>
-          <a:p>
-            <a:r>
-              <a:rPr lang="en-US" dirty="0"/>
-              <a:t>Shared, mutable, unsynchronized: pick the guard by what you are guarding</a:t>
-            </a:r>
-          </a:p>
-          <a:p>
-            <a:r>
-              <a:rPr lang="en-US" dirty="0"/>
-              <a:t>One side handing work to another: a Channel&lt;T&gt;, not a polling loop</a:t>
-            </a:r>
-          </a:p>
-        </p:txBody>
-      </p:sp>
+      </p:pic>
     </p:spTree>
-  </p:cSld>
-  <p:clrMapOvr>
-    <a:masterClrMapping/>
-  </p:clrMapOvr>
-  <mc:AlternateContent xmlns:mc="http://schemas.openxmlformats.org/markup-compatibility/2006" xmlns:p14="http://schemas.microsoft.com/office/powerpoint/2010/main">
-    <mc:Choice Requires="p14">
-      <p:transition spd="med" p14:dur="700">
-        <p:fade/>
-      </p:transition>
-    </mc:Choice>
-    <mc:Fallback xmlns="">
-      <p:transition spd="med">
-        <p:fade/>
-      </p:transition>
-    </mc:Fallback>
-  </mc:AlternateContent>
-</p:sld>
-</file>
-
-<file path=ppt/slides/slide16.xml><?xml version="1.0" encoding="utf-8"?>
-<p:sld xmlns:a="http://schemas.openxmlformats.org/drawingml/2006/main" xmlns:p="http://schemas.openxmlformats.org/presentationml/2006/main" xmlns:r="http://schemas.openxmlformats.org/officeDocument/2006/relationships">
-  <p:cSld>
-    <p:spTree>
-      <p:nvGrpSpPr>
-        <p:cNvPr id="1" name=""/>
-        <p:cNvGrpSpPr/>
-        <p:nvPr/>
-      </p:nvGrpSpPr>
-      <p:grpSpPr/>
-      <p:sp>
-        <p:nvSpPr>
-          <p:cNvPr id="2" name="Title 1"/>
-          <p:cNvSpPr>
-            <a:spLocks noGrp="1"/>
-          </p:cNvSpPr>
-          <p:nvPr>
-            <p:ph type="title"/>
-          </p:nvPr>
-        </p:nvSpPr>
-        <p:spPr/>
-        <p:txBody>
-          <a:bodyPr/>
-          <a:lstStyle/>
-          <a:p>
-            <a:r>
-              <a:rPr lang="en-US" dirty="0"/>
-              <a:t>Where to Go Next</a:t>
-            </a:r>
-            <a:br>
-              <a:rPr lang="en-US" dirty="0"/>
-            </a:br>
-            <a:r>
-              <a:rPr lang="en-US" sz="3200" dirty="0">
-                <a:gradFill>
-                  <a:gsLst>
-                    <a:gs pos="1250">
-                      <a:srgbClr val="FFB900"/>
-                    </a:gs>
-                    <a:gs pos="100000">
-                      <a:srgbClr val="FFB900"/>
-                    </a:gs>
-                  </a:gsLst>
-                  <a:lin ang="5400000" scaled="0"/>
-                </a:gradFill>
-              </a:rPr>
-              <a:t>Resources</a:t>
-            </a:r>
-            <a:endParaRPr lang="en-US" sz="4000" dirty="0">
-              <a:gradFill>
-                <a:gsLst>
-                  <a:gs pos="1250">
-                    <a:srgbClr val="FFB900"/>
-                  </a:gs>
-                  <a:gs pos="100000">
-                    <a:srgbClr val="FFB900"/>
-                  </a:gs>
-                </a:gsLst>
-                <a:lin ang="5400000" scaled="0"/>
-              </a:gradFill>
-            </a:endParaRPr>
-          </a:p>
-        </p:txBody>
-      </p:sp>
-      <p:sp>
-        <p:nvSpPr>
-          <p:cNvPr id="3" name="Text Placeholder 2"/>
-          <p:cNvSpPr>
-            <a:spLocks noGrp="1"/>
-          </p:cNvSpPr>
-          <p:nvPr>
-            <p:ph type="body" idx="10" sz="quarter"/>
-          </p:nvPr>
-        </p:nvSpPr>
-        <p:spPr>
-          <a:xfrm>
-            <a:off x="274320" y="1627632"/>
-            <a:ext cx="11887200" cy="3594830"/>
-          </a:xfrm>
-        </p:spPr>
-        <p:txBody>
-          <a:bodyPr/>
-          <a:lstStyle/>
-          <a:p>
-            <a:r>
-              <a:rPr lang="en-US" dirty="0"/>
-              <a:t>The repo: every deck, every starter, every SOLUTION.md, and these notes</a:t>
-            </a:r>
-          </a:p>
-          <a:p>
-            <a:r>
-              <a:rPr lang="en-US" dirty="0"/>
-              <a:t>https://codetraveler.io/AsyncAwaitBestPractices/</a:t>
-            </a:r>
-          </a:p>
-          <a:p>
-            <a:r>
-              <a:rPr lang="en-US" dirty="0"/>
-              <a:t>The Microsoft docs link at the end of each slide's notes</a:t>
-            </a:r>
-          </a:p>
-          <a:p>
-            <a:r>
-              <a:rPr lang="en-US" dirty="0"/>
-              <a:t>Dometrain: From Zero to Hero Asynchronous Programming in C#</a:t>
-            </a:r>
-          </a:p>
-          <a:p>
-            <a:r>
-              <a:rPr lang="en-US" dirty="0"/>
-              <a:t>Dometrain: From Zero to Hero Parallel Programming in C#</a:t>
-            </a:r>
-          </a:p>
-        </p:txBody>
-      </p:sp>
-    </p:spTree>
-  </p:cSld>
-  <p:clrMapOvr>
-    <a:masterClrMapping/>
-  </p:clrMapOvr>
-  <mc:AlternateContent xmlns:mc="http://schemas.openxmlformats.org/markup-compatibility/2006" xmlns:p14="http://schemas.microsoft.com/office/powerpoint/2010/main">
-    <mc:Choice Requires="p14">
-      <p:transition spd="med" p14:dur="700">
-        <p:fade/>
-      </p:transition>
-    </mc:Choice>
-    <mc:Fallback xmlns="">
-      <p:transition spd="med">
-        <p:fade/>
-      </p:transition>
-    </mc:Fallback>
-  </mc:AlternateContent>
-</p:sld>
-</file>
-
-<file path=ppt/slides/slide17.xml><?xml version="1.0" encoding="utf-8"?>
-<p:sld xmlns:a="http://schemas.openxmlformats.org/drawingml/2006/main" xmlns:p="http://schemas.openxmlformats.org/presentationml/2006/main" xmlns:r="http://schemas.openxmlformats.org/officeDocument/2006/relationships">
-  <p:cSld>
-    <p:spTree>
-      <p:nvGrpSpPr>
-        <p:cNvPr id="1" name=""/>
-        <p:cNvGrpSpPr/>
-        <p:nvPr/>
-      </p:nvGrpSpPr>
-      <p:grpSpPr/>
-      <p:sp>
-        <p:nvSpPr>
-          <p:cNvPr id="2" name="Title 1"/>
-          <p:cNvSpPr>
-            <a:spLocks noGrp="1"/>
-          </p:cNvSpPr>
-          <p:nvPr>
-            <p:ph type="title"/>
-          </p:nvPr>
-        </p:nvSpPr>
-        <p:spPr/>
-        <p:txBody>
-          <a:bodyPr/>
-          <a:lstStyle/>
-          <a:p>
-            <a:r>
-              <a:rPr lang="en-US" dirty="0"/>
-              <a:t>Working Together</a:t>
-            </a:r>
-            <a:br>
-              <a:rPr lang="en-US" dirty="0"/>
-            </a:br>
-            <a:r>
-              <a:rPr lang="en-US" sz="3200" dirty="0">
-                <a:gradFill>
-                  <a:gsLst>
-                    <a:gs pos="1250">
-                      <a:srgbClr val="FFB900"/>
-                    </a:gs>
-                    <a:gs pos="100000">
-                      <a:srgbClr val="FFB900"/>
-                    </a:gs>
-                  </a:gsLst>
-                  <a:lin ang="5400000" scaled="0"/>
-                </a:gradFill>
-              </a:rPr>
-              <a:t>Code Traveler, LLC</a:t>
-            </a:r>
-            <a:endParaRPr lang="en-US" sz="4000" dirty="0">
-              <a:gradFill>
-                <a:gsLst>
-                  <a:gs pos="1250">
-                    <a:srgbClr val="FFB900"/>
-                  </a:gs>
-                  <a:gs pos="100000">
-                    <a:srgbClr val="FFB900"/>
-                  </a:gs>
-                </a:gsLst>
-                <a:lin ang="5400000" scaled="0"/>
-              </a:gradFill>
-            </a:endParaRPr>
-          </a:p>
-        </p:txBody>
-      </p:sp>
-      <p:sp>
-        <p:nvSpPr>
-          <p:cNvPr id="3" name="Text Placeholder 2"/>
-          <p:cNvSpPr>
-            <a:spLocks noGrp="1"/>
-          </p:cNvSpPr>
-          <p:nvPr>
-            <p:ph type="body" idx="10" sz="quarter"/>
-          </p:nvPr>
-        </p:nvSpPr>
-        <p:spPr>
-          <a:xfrm>
-            <a:off x="274320" y="1627632"/>
-            <a:ext cx="11887200" cy="3594830"/>
-          </a:xfrm>
-        </p:spPr>
-        <p:txBody>
-          <a:bodyPr/>
-          <a:lstStyle/>
-          <a:p>
-            <a:r>
-              <a:rPr lang="en-US" dirty="0"/>
-              <a:t>.NET consulting: async and parallel code that is already in production</a:t>
-            </a:r>
-          </a:p>
-          <a:p>
-            <a:r>
-              <a:rPr lang="en-US" dirty="0"/>
-              <a:t>Code review, design review, and this workshop run for your team</a:t>
-            </a:r>
-          </a:p>
-          <a:p>
-            <a:r>
-              <a:rPr lang="en-US" dirty="0"/>
-              <a:t>Developer Advocacy consulting: building or repairing a DevRel practice</a:t>
-            </a:r>
-          </a:p>
-          <a:p>
-            <a:r>
-              <a:rPr lang="en-US" dirty="0"/>
-              <a:t>Docs, samples, talks and community work that developers actually use</a:t>
-            </a:r>
-          </a:p>
-          <a:p>
-            <a:r>
-              <a:rPr lang="en-US" dirty="0"/>
-              <a:t>[contact email] / [website] / [LinkedIn]</a:t>
-            </a:r>
-          </a:p>
-        </p:txBody>
-      </p:sp>
-    </p:spTree>
-  </p:cSld>
-  <p:clrMapOvr>
-    <a:masterClrMapping/>
-  </p:clrMapOvr>
-  <mc:AlternateContent xmlns:mc="http://schemas.openxmlformats.org/markup-compatibility/2006" xmlns:p14="http://schemas.microsoft.com/office/powerpoint/2010/main">
-    <mc:Choice Requires="p14">
-      <p:transition spd="med" p14:dur="700">
-        <p:fade/>
-      </p:transition>
-    </mc:Choice>
-    <mc:Fallback xmlns="">
-      <p:transition spd="med">
-        <p:fade/>
-      </p:transition>
-    </mc:Fallback>
-  </mc:AlternateContent>
-</p:sld>
-</file>
-
-<file path=ppt/slides/slide18.xml><?xml version="1.0" encoding="utf-8"?>
-<p:sld xmlns:a="http://schemas.openxmlformats.org/drawingml/2006/main" xmlns:p="http://schemas.openxmlformats.org/presentationml/2006/main" xmlns:r="http://schemas.openxmlformats.org/officeDocument/2006/relationships">
-  <p:cSld>
-    <p:spTree>
-      <p:nvGrpSpPr>
-        <p:cNvPr id="1" name=""/>
-        <p:cNvGrpSpPr/>
-        <p:nvPr/>
-      </p:nvGrpSpPr>
-      <p:grpSpPr/>
-      <p:sp>
-        <p:nvSpPr>
-          <p:cNvPr id="2" name="Title 1"/>
-          <p:cNvSpPr>
-            <a:spLocks noGrp="1"/>
-          </p:cNvSpPr>
-          <p:nvPr>
-            <p:ph type="title"/>
-          </p:nvPr>
-        </p:nvSpPr>
-        <p:spPr/>
-        <p:txBody>
-          <a:bodyPr/>
-          <a:lstStyle/>
-          <a:p>
-            <a:r>
-              <a:rPr lang="en-US" dirty="0"/>
-              <a:t>Thank You</a:t>
-            </a:r>
-            <a:br>
-              <a:rPr lang="en-US" dirty="0"/>
-            </a:br>
-            <a:r>
-              <a:rPr lang="en-US" sz="3200" dirty="0">
-                <a:gradFill>
-                  <a:gsLst>
-                    <a:gs pos="1250">
-                      <a:srgbClr val="FFB900"/>
-                    </a:gs>
-                    <a:gs pos="100000">
-                      <a:srgbClr val="FFB900"/>
-                    </a:gs>
-                  </a:gsLst>
-                  <a:lin ang="5400000" scaled="0"/>
-                </a:gradFill>
-              </a:rPr>
-              <a:t>Go Break Something on Purpose</a:t>
-            </a:r>
-            <a:endParaRPr lang="en-US" sz="4000" dirty="0">
-              <a:gradFill>
-                <a:gsLst>
-                  <a:gs pos="1250">
-                    <a:srgbClr val="FFB900"/>
-                  </a:gs>
-                  <a:gs pos="100000">
-                    <a:srgbClr val="FFB900"/>
-                  </a:gs>
-                </a:gsLst>
-                <a:lin ang="5400000" scaled="0"/>
-              </a:gradFill>
-            </a:endParaRPr>
-          </a:p>
-        </p:txBody>
-      </p:sp>
-      <p:sp>
-        <p:nvSpPr>
-          <p:cNvPr id="3" name="Text Placeholder 2"/>
-          <p:cNvSpPr>
-            <a:spLocks noGrp="1"/>
-          </p:cNvSpPr>
-          <p:nvPr>
-            <p:ph type="body" idx="10" sz="quarter"/>
-          </p:nvPr>
-        </p:nvSpPr>
-        <p:spPr>
-          <a:xfrm>
-            <a:off x="274320" y="1627632"/>
-            <a:ext cx="11887200" cy="3594830"/>
-          </a:xfrm>
-        </p:spPr>
-        <p:txBody>
-          <a:bodyPr/>
-          <a:lstStyle/>
-          <a:p>
-            <a:r>
-              <a:rPr lang="en-US" dirty="0"/>
-              <a:t>Two days, nine sections, seven coding challenges, four investigations</a:t>
-            </a:r>
-          </a:p>
-          <a:p>
-            <a:r>
-              <a:rPr lang="en-US" dirty="0"/>
-              <a:t>Everything is in the repo, including these speaker notes</a:t>
-            </a:r>
-          </a:p>
-          <a:p>
-            <a:r>
-              <a:rPr lang="en-US" dirty="0"/>
-              <a:t>https://codetraveler.io/AsyncAwaitBestPractices/</a:t>
-            </a:r>
-          </a:p>
-          <a:p>
-            <a:r>
-              <a:rPr lang="en-US" dirty="0"/>
-              <a:t>Questions now, or [contact email] any time after</a:t>
-            </a:r>
-          </a:p>
-        </p:txBody>
-      </p:sp>
-    </p:spTree>
+    <p:extLst>
+      <p:ext uri="{BB962C8B-B14F-4D97-AF65-F5344CB8AC3E}">
+        <p14:creationId xmlns:p14="http://schemas.microsoft.com/office/powerpoint/2010/main" val="2716418461"/>
+      </p:ext>
+    </p:extLst>
   </p:cSld>
   <p:clrMapOvr>
     <a:masterClrMapping/>
@@ -9657,6 +8664,25 @@
 </file>
 
 <file path=customXml/item1.xml><?xml version="1.0" encoding="utf-8"?>
+<p:properties xmlns:p="http://schemas.microsoft.com/office/2006/metadata/properties" xmlns:xsi="http://www.w3.org/2001/XMLSchema-instance" xmlns:pc="http://schemas.microsoft.com/office/infopath/2007/PartnerControls">
+  <documentManagement>
+    <_ip_UnifiedCompliancePolicyUIAction xmlns="http://schemas.microsoft.com/sharepoint/v3" xsi:nil="true"/>
+    <MediaServiceKeyPoints xmlns="16dc66bd-df5a-4495-a5c9-5e296f49988a" xsi:nil="true"/>
+    <_ip_UnifiedCompliancePolicyProperties xmlns="http://schemas.microsoft.com/sharepoint/v3" xsi:nil="true"/>
+  </documentManagement>
+</p:properties>
+</file>
+
+<file path=customXml/item2.xml><?xml version="1.0" encoding="utf-8"?>
+<?mso-contentType ?>
+<FormTemplates xmlns="http://schemas.microsoft.com/sharepoint/v3/contenttype/forms">
+  <Display>DocumentLibraryForm</Display>
+  <Edit>DocumentLibraryForm</Edit>
+  <New>DocumentLibraryForm</New>
+</FormTemplates>
+</file>
+
+<file path=customXml/item3.xml><?xml version="1.0" encoding="utf-8"?>
 <ct:contentTypeSchema xmlns:ct="http://schemas.microsoft.com/office/2006/metadata/contentType" xmlns:ma="http://schemas.microsoft.com/office/2006/metadata/properties/metaAttributes" ct:_="" ma:_="" ma:contentTypeName="Document" ma:contentTypeID="0x010100A33D2391BFF58241AEB203BD95DC1F89" ma:contentTypeVersion="16" ma:contentTypeDescription="Create a new document." ma:contentTypeScope="" ma:versionID="bd4b5e6fa70efd11586bd069caa6259f">
   <xsd:schema xmlns:xsd="http://www.w3.org/2001/XMLSchema" xmlns:xs="http://www.w3.org/2001/XMLSchema" xmlns:p="http://schemas.microsoft.com/office/2006/metadata/properties" xmlns:ns1="http://schemas.microsoft.com/sharepoint/v3" xmlns:ns2="16dc66bd-df5a-4495-a5c9-5e296f49988a" xmlns:ns3="12239fb0-26c0-4a37-b790-6c81fba9d0fc" targetNamespace="http://schemas.microsoft.com/office/2006/metadata/properties" ma:root="true" ma:fieldsID="1236f19879e555dfdef409a5be7c6d72" ns1:_="" ns2:_="" ns3:_="">
     <xsd:import namespace="http://schemas.microsoft.com/sharepoint/v3"/>
@@ -9902,26 +8928,33 @@
 </ct:contentTypeSchema>
 </file>
 
-<file path=customXml/item2.xml><?xml version="1.0" encoding="utf-8"?>
-<?mso-contentType ?>
-<FormTemplates xmlns="http://schemas.microsoft.com/sharepoint/v3/contenttype/forms">
-  <Display>DocumentLibraryForm</Display>
-  <Edit>DocumentLibraryForm</Edit>
-  <New>DocumentLibraryForm</New>
-</FormTemplates>
+<file path=customXml/itemProps1.xml><?xml version="1.0" encoding="utf-8"?>
+<ds:datastoreItem xmlns:ds="http://schemas.openxmlformats.org/officeDocument/2006/customXml" ds:itemID="{B59C5458-A72E-4627-9FFC-D350DCB4700F}">
+  <ds:schemaRefs>
+    <ds:schemaRef ds:uri="http://schemas.microsoft.com/office/2006/metadata/properties"/>
+    <ds:schemaRef ds:uri="http://schemas.openxmlformats.org/package/2006/metadata/core-properties"/>
+    <ds:schemaRef ds:uri="http://purl.org/dc/dcmitype/"/>
+    <ds:schemaRef ds:uri="http://schemas.microsoft.com/office/infopath/2007/PartnerControls"/>
+    <ds:schemaRef ds:uri="http://schemas.microsoft.com/sharepoint/v3"/>
+    <ds:schemaRef ds:uri="http://purl.org/dc/elements/1.1/"/>
+    <ds:schemaRef ds:uri="http://schemas.microsoft.com/office/2006/documentManagement/types"/>
+    <ds:schemaRef ds:uri="12239fb0-26c0-4a37-b790-6c81fba9d0fc"/>
+    <ds:schemaRef ds:uri="16dc66bd-df5a-4495-a5c9-5e296f49988a"/>
+    <ds:schemaRef ds:uri="http://www.w3.org/XML/1998/namespace"/>
+    <ds:schemaRef ds:uri="http://purl.org/dc/terms/"/>
+  </ds:schemaRefs>
+</ds:datastoreItem>
 </file>
 
-<file path=customXml/item3.xml><?xml version="1.0" encoding="utf-8"?>
-<p:properties xmlns:p="http://schemas.microsoft.com/office/2006/metadata/properties" xmlns:xsi="http://www.w3.org/2001/XMLSchema-instance" xmlns:pc="http://schemas.microsoft.com/office/infopath/2007/PartnerControls">
-  <documentManagement>
-    <_ip_UnifiedCompliancePolicyUIAction xmlns="http://schemas.microsoft.com/sharepoint/v3" xsi:nil="true"/>
-    <MediaServiceKeyPoints xmlns="16dc66bd-df5a-4495-a5c9-5e296f49988a" xsi:nil="true"/>
-    <_ip_UnifiedCompliancePolicyProperties xmlns="http://schemas.microsoft.com/sharepoint/v3" xsi:nil="true"/>
-  </documentManagement>
-</p:properties>
+<file path=customXml/itemProps2.xml><?xml version="1.0" encoding="utf-8"?>
+<ds:datastoreItem xmlns:ds="http://schemas.openxmlformats.org/officeDocument/2006/customXml" ds:itemID="{758FDAC0-319D-4A54-8D8E-1D42CB1F8004}">
+  <ds:schemaRefs>
+    <ds:schemaRef ds:uri="http://schemas.microsoft.com/sharepoint/v3/contenttype/forms"/>
+  </ds:schemaRefs>
+</ds:datastoreItem>
 </file>
 
-<file path=customXml/itemProps1.xml><?xml version="1.0" encoding="utf-8"?>
+<file path=customXml/itemProps3.xml><?xml version="1.0" encoding="utf-8"?>
 <ds:datastoreItem xmlns:ds="http://schemas.openxmlformats.org/officeDocument/2006/customXml" ds:itemID="{F517AA3B-FC88-46DF-B5BA-DC6634CFCC94}">
   <ds:schemaRefs>
     <ds:schemaRef ds:uri="12239fb0-26c0-4a37-b790-6c81fba9d0fc"/>
@@ -9941,32 +8974,6 @@
 </ds:datastoreItem>
 </file>
 
-<file path=customXml/itemProps2.xml><?xml version="1.0" encoding="utf-8"?>
-<ds:datastoreItem xmlns:ds="http://schemas.openxmlformats.org/officeDocument/2006/customXml" ds:itemID="{758FDAC0-319D-4A54-8D8E-1D42CB1F8004}">
-  <ds:schemaRefs>
-    <ds:schemaRef ds:uri="http://schemas.microsoft.com/sharepoint/v3/contenttype/forms"/>
-  </ds:schemaRefs>
-</ds:datastoreItem>
-</file>
-
-<file path=customXml/itemProps3.xml><?xml version="1.0" encoding="utf-8"?>
-<ds:datastoreItem xmlns:ds="http://schemas.openxmlformats.org/officeDocument/2006/customXml" ds:itemID="{B59C5458-A72E-4627-9FFC-D350DCB4700F}">
-  <ds:schemaRefs>
-    <ds:schemaRef ds:uri="http://schemas.microsoft.com/office/2006/metadata/properties"/>
-    <ds:schemaRef ds:uri="http://schemas.openxmlformats.org/package/2006/metadata/core-properties"/>
-    <ds:schemaRef ds:uri="http://purl.org/dc/dcmitype/"/>
-    <ds:schemaRef ds:uri="http://schemas.microsoft.com/office/infopath/2007/PartnerControls"/>
-    <ds:schemaRef ds:uri="http://schemas.microsoft.com/sharepoint/v3"/>
-    <ds:schemaRef ds:uri="http://purl.org/dc/elements/1.1/"/>
-    <ds:schemaRef ds:uri="http://schemas.microsoft.com/office/2006/documentManagement/types"/>
-    <ds:schemaRef ds:uri="12239fb0-26c0-4a37-b790-6c81fba9d0fc"/>
-    <ds:schemaRef ds:uri="16dc66bd-df5a-4495-a5c9-5e296f49988a"/>
-    <ds:schemaRef ds:uri="http://www.w3.org/XML/1998/namespace"/>
-    <ds:schemaRef ds:uri="http://purl.org/dc/terms/"/>
-  </ds:schemaRefs>
-</ds:datastoreItem>
-</file>
-
 <file path=docMetadata/LabelInfo.xml><?xml version="1.0" encoding="utf-8"?>
 <clbl:labelList xmlns:clbl="http://schemas.microsoft.com/office/2020/mipLabelMetadata">
   <clbl:label id="{f42aa342-8706-4288-bd11-ebb85995028c}" enabled="1" method="Privileged" siteId="{72f988bf-86f1-41af-91ab-2d7cd011db47}" removed="0"/>

--- a/10. Thank You/ThankYou.pptx
+++ b/10. Thank You/ThankYou.pptx
@@ -242,7 +242,7 @@
               <a:rPr lang="en-US" smtClean="0">
                 <a:latin typeface="Segoe UI" pitchFamily="34" charset="0"/>
               </a:rPr>
-              <a:t>9/14/26 8:08 PM</a:t>
+              <a:t>9/15/26 3:41 PM</a:t>
             </a:fld>
             <a:endParaRPr lang="en-US">
               <a:latin typeface="Segoe UI" pitchFamily="34" charset="0"/>
@@ -520,7 +520,7 @@
           <a:p>
             <a:fld id="{D18B56EA-E28F-4F92-9F16-7A6F2501B303}" type="datetime8">
               <a:rPr lang="en-US" smtClean="0"/>
-              <a:t>9/14/26 8:08 PM</a:t>
+              <a:t>9/15/26 3:40 PM</a:t>
             </a:fld>
             <a:endParaRPr lang="en-US"/>
           </a:p>
@@ -887,7 +887,7 @@
           <a:p>
             <a:fld id="{D18B56EA-E28F-4F92-9F16-7A6F2501B303}" type="datetime8">
               <a:rPr lang="en-US" smtClean="0"/>
-              <a:t>9/14/26 8:08 PM</a:t>
+              <a:t>9/15/26 3:40 PM</a:t>
             </a:fld>
             <a:endParaRPr lang="en-US"/>
           </a:p>
@@ -1088,7 +1088,7 @@
           <a:p>
             <a:fld id="{D18B56EA-E28F-4F92-9F16-7A6F2501B303}" type="datetime8">
               <a:rPr lang="en-US" smtClean="0"/>
-              <a:t>9/14/26 8:08 PM</a:t>
+              <a:t>9/15/26 3:40 PM</a:t>
             </a:fld>
             <a:endParaRPr lang="en-US"/>
           </a:p>
@@ -4743,35 +4743,35 @@
           <a:p>
             <a:pPr lvl="0"/>
             <a:r>
-              <a:rPr lang="en-US"/>
+              <a:rPr lang="en-US" dirty="0"/>
               <a:t>Edit Master text styles</a:t>
             </a:r>
           </a:p>
           <a:p>
             <a:pPr lvl="1"/>
             <a:r>
-              <a:rPr lang="en-US"/>
+              <a:rPr lang="en-US" dirty="0"/>
               <a:t>Second level</a:t>
             </a:r>
           </a:p>
           <a:p>
             <a:pPr lvl="2"/>
             <a:r>
-              <a:rPr lang="en-US"/>
+              <a:rPr lang="en-US" dirty="0"/>
               <a:t>Third level</a:t>
             </a:r>
           </a:p>
           <a:p>
             <a:pPr lvl="3"/>
             <a:r>
-              <a:rPr lang="en-US"/>
+              <a:rPr lang="en-US" dirty="0"/>
               <a:t>Fourth level</a:t>
             </a:r>
           </a:p>
           <a:p>
             <a:pPr lvl="4"/>
             <a:r>
-              <a:rPr lang="en-US"/>
+              <a:rPr lang="en-US" dirty="0"/>
               <a:t>Fifth level</a:t>
             </a:r>
           </a:p>
@@ -4815,10 +4815,10 @@
         </p:nvGrpSpPr>
         <p:grpSpPr>
           <a:xfrm>
-            <a:off x="274701" y="6364816"/>
-            <a:ext cx="2167492" cy="353943"/>
-            <a:chOff x="8703664" y="6310423"/>
-            <a:chExt cx="2273864" cy="360989"/>
+            <a:off x="274639" y="6364815"/>
+            <a:ext cx="2324791" cy="353943"/>
+            <a:chOff x="8344801" y="6310423"/>
+            <a:chExt cx="2438883" cy="360989"/>
           </a:xfrm>
         </p:grpSpPr>
         <p:pic>
@@ -4842,7 +4842,7 @@
           </p:blipFill>
           <p:spPr>
             <a:xfrm>
-              <a:off x="10600392" y="6337020"/>
+              <a:off x="8344801" y="6327575"/>
               <a:ext cx="377136" cy="323942"/>
             </a:xfrm>
             <a:prstGeom prst="rect">
@@ -4916,6 +4916,266 @@
                   <a:schemeClr val="tx1"/>
                 </a:solidFill>
               </a:endParaRPr>
+            </a:p>
+          </p:txBody>
+        </p:sp>
+      </p:grpSp>
+      <p:grpSp>
+        <p:nvGrpSpPr>
+          <p:cNvPr id="14" name="Group 13">
+            <a:extLst>
+              <a:ext uri="{FF2B5EF4-FFF2-40B4-BE49-F238E27FC236}">
+                <a16:creationId xmlns:a16="http://schemas.microsoft.com/office/drawing/2014/main" id="{98F9BAED-5FB6-E591-0A5C-CC84B9CA08BB}"/>
+              </a:ext>
+            </a:extLst>
+          </p:cNvPr>
+          <p:cNvGrpSpPr/>
+          <p:nvPr userDrawn="1"/>
+        </p:nvGrpSpPr>
+        <p:grpSpPr>
+          <a:xfrm>
+            <a:off x="9658756" y="6207294"/>
+            <a:ext cx="3100528" cy="572422"/>
+            <a:chOff x="9539152" y="6255576"/>
+            <a:chExt cx="3100528" cy="572422"/>
+          </a:xfrm>
+        </p:grpSpPr>
+        <p:sp>
+          <p:nvSpPr>
+            <p:cNvPr id="7" name="TextBox 6">
+              <a:extLst>
+                <a:ext uri="{FF2B5EF4-FFF2-40B4-BE49-F238E27FC236}">
+                  <a16:creationId xmlns:a16="http://schemas.microsoft.com/office/drawing/2014/main" id="{9542B5AC-D981-6EAC-FCE0-4AEB05C4FCEE}"/>
+                </a:ext>
+              </a:extLst>
+            </p:cNvPr>
+            <p:cNvSpPr txBox="1"/>
+            <p:nvPr userDrawn="1"/>
+          </p:nvSpPr>
+          <p:spPr>
+            <a:xfrm>
+              <a:off x="9926297" y="6255576"/>
+              <a:ext cx="2713383" cy="572422"/>
+            </a:xfrm>
+            <a:prstGeom prst="rect">
+              <a:avLst/>
+            </a:prstGeom>
+            <a:noFill/>
+          </p:spPr>
+          <p:txBody>
+            <a:bodyPr wrap="square" lIns="182855" tIns="146283" rIns="182855" bIns="146283" rtlCol="0">
+              <a:spAutoFit/>
+            </a:bodyPr>
+            <a:lstStyle/>
+            <a:p>
+              <a:pPr marL="0" marR="0" lvl="0" indent="0" algn="l" defTabSz="932396" rtl="0" eaLnBrk="1" fontAlgn="auto" latinLnBrk="0" hangingPunct="1">
+                <a:lnSpc>
+                  <a:spcPct val="100000"/>
+                </a:lnSpc>
+                <a:spcBef>
+                  <a:spcPts val="0"/>
+                </a:spcBef>
+                <a:spcAft>
+                  <a:spcPts val="0"/>
+                </a:spcAft>
+                <a:buClrTx/>
+                <a:buSzTx/>
+                <a:buFontTx/>
+                <a:buNone/>
+                <a:tabLst/>
+                <a:defRPr/>
+              </a:pPr>
+              <a:r>
+                <a:rPr kumimoji="0" lang="en-US" b="0" i="0" u="none" strike="noStrike" kern="0" cap="none" spc="0" normalizeH="0" baseline="0" noProof="0" dirty="0">
+                  <a:ln>
+                    <a:noFill/>
+                  </a:ln>
+                  <a:solidFill>
+                    <a:schemeClr val="tx1"/>
+                  </a:solidFill>
+                  <a:effectLst/>
+                  <a:uLnTx/>
+                  <a:uFillTx/>
+                  <a:latin typeface="+mn-lt"/>
+                  <a:ea typeface="+mn-ea"/>
+                  <a:cs typeface="+mn-cs"/>
+                </a:rPr>
+                <a:t>@</a:t>
+              </a:r>
+              <a:r>
+                <a:rPr kumimoji="0" lang="en-US" b="0" i="0" u="none" strike="noStrike" kern="0" cap="none" spc="0" normalizeH="0" baseline="0" noProof="0" dirty="0" err="1">
+                  <a:ln>
+                    <a:noFill/>
+                  </a:ln>
+                  <a:solidFill>
+                    <a:schemeClr val="tx1"/>
+                  </a:solidFill>
+                  <a:effectLst/>
+                  <a:uLnTx/>
+                  <a:uFillTx/>
+                  <a:latin typeface="+mn-lt"/>
+                  <a:ea typeface="+mn-ea"/>
+                  <a:cs typeface="+mn-cs"/>
+                </a:rPr>
+                <a:t>TheCodeTraveler</a:t>
+              </a:r>
+              <a:endParaRPr kumimoji="0" lang="en-US" b="0" i="0" u="none" strike="noStrike" kern="0" cap="none" spc="0" normalizeH="0" baseline="0" noProof="0" dirty="0">
+                <a:ln>
+                  <a:noFill/>
+                </a:ln>
+                <a:solidFill>
+                  <a:schemeClr val="tx1"/>
+                </a:solidFill>
+                <a:effectLst/>
+                <a:uLnTx/>
+                <a:uFillTx/>
+                <a:latin typeface="+mn-lt"/>
+                <a:ea typeface="+mn-ea"/>
+                <a:cs typeface="+mn-cs"/>
+              </a:endParaRPr>
+            </a:p>
+          </p:txBody>
+        </p:sp>
+        <p:pic>
+          <p:nvPicPr>
+            <p:cNvPr id="9" name="Picture 8">
+              <a:extLst>
+                <a:ext uri="{FF2B5EF4-FFF2-40B4-BE49-F238E27FC236}">
+                  <a16:creationId xmlns:a16="http://schemas.microsoft.com/office/drawing/2014/main" id="{278E531C-4E27-F84E-8649-D297710AC473}"/>
+                </a:ext>
+              </a:extLst>
+            </p:cNvPr>
+            <p:cNvPicPr>
+              <a:picLocks noChangeAspect="1"/>
+            </p:cNvPicPr>
+            <p:nvPr userDrawn="1"/>
+          </p:nvPicPr>
+          <p:blipFill>
+            <a:blip r:embed="rId12">
+              <a:extLst>
+                <a:ext uri="{28A0092B-C50C-407E-A947-70E740481C1C}">
+                  <a14:useLocalDpi xmlns:a14="http://schemas.microsoft.com/office/drawing/2010/main" val="0"/>
+                </a:ext>
+              </a:extLst>
+            </a:blip>
+            <a:stretch>
+              <a:fillRect/>
+            </a:stretch>
+          </p:blipFill>
+          <p:spPr>
+            <a:xfrm>
+              <a:off x="9539152" y="6338788"/>
+              <a:ext cx="404737" cy="369725"/>
+            </a:xfrm>
+            <a:prstGeom prst="rect">
+              <a:avLst/>
+            </a:prstGeom>
+          </p:spPr>
+        </p:pic>
+      </p:grpSp>
+      <p:grpSp>
+        <p:nvGrpSpPr>
+          <p:cNvPr id="13" name="Group 12">
+            <a:extLst>
+              <a:ext uri="{FF2B5EF4-FFF2-40B4-BE49-F238E27FC236}">
+                <a16:creationId xmlns:a16="http://schemas.microsoft.com/office/drawing/2014/main" id="{2D163020-DCBA-C37B-327F-2CF76BD64B9F}"/>
+              </a:ext>
+            </a:extLst>
+          </p:cNvPr>
+          <p:cNvGrpSpPr/>
+          <p:nvPr userDrawn="1"/>
+        </p:nvGrpSpPr>
+        <p:grpSpPr>
+          <a:xfrm>
+            <a:off x="4997941" y="6312106"/>
+            <a:ext cx="2440591" cy="387145"/>
+            <a:chOff x="4933480" y="6369862"/>
+            <a:chExt cx="2440591" cy="387145"/>
+          </a:xfrm>
+        </p:grpSpPr>
+        <p:pic>
+          <p:nvPicPr>
+            <p:cNvPr id="11" name="Picture 10">
+              <a:extLst>
+                <a:ext uri="{FF2B5EF4-FFF2-40B4-BE49-F238E27FC236}">
+                  <a16:creationId xmlns:a16="http://schemas.microsoft.com/office/drawing/2014/main" id="{65D5D57F-12DA-4CB3-84E5-929FF3AD47F9}"/>
+                </a:ext>
+              </a:extLst>
+            </p:cNvPr>
+            <p:cNvPicPr>
+              <a:picLocks noChangeAspect="1"/>
+            </p:cNvPicPr>
+            <p:nvPr userDrawn="1"/>
+          </p:nvPicPr>
+          <p:blipFill>
+            <a:blip r:embed="rId13"/>
+            <a:stretch>
+              <a:fillRect/>
+            </a:stretch>
+          </p:blipFill>
+          <p:spPr>
+            <a:xfrm>
+              <a:off x="4933480" y="6369862"/>
+              <a:ext cx="387145" cy="387145"/>
+            </a:xfrm>
+            <a:prstGeom prst="rect">
+              <a:avLst/>
+            </a:prstGeom>
+          </p:spPr>
+        </p:pic>
+        <p:sp>
+          <p:nvSpPr>
+            <p:cNvPr id="12" name="TextBox 11">
+              <a:extLst>
+                <a:ext uri="{FF2B5EF4-FFF2-40B4-BE49-F238E27FC236}">
+                  <a16:creationId xmlns:a16="http://schemas.microsoft.com/office/drawing/2014/main" id="{8365375F-2E9E-E3E3-F5FF-87B8AB37FACA}"/>
+                </a:ext>
+              </a:extLst>
+            </p:cNvPr>
+            <p:cNvSpPr txBox="1"/>
+            <p:nvPr userDrawn="1"/>
+          </p:nvSpPr>
+          <p:spPr>
+            <a:xfrm>
+              <a:off x="5391355" y="6374290"/>
+              <a:ext cx="1982716" cy="353943"/>
+            </a:xfrm>
+            <a:prstGeom prst="rect">
+              <a:avLst/>
+            </a:prstGeom>
+            <a:noFill/>
+          </p:spPr>
+          <p:txBody>
+            <a:bodyPr wrap="square" rtlCol="0">
+              <a:spAutoFit/>
+            </a:bodyPr>
+            <a:lstStyle/>
+            <a:p>
+              <a:pPr marL="0" marR="0" lvl="0" indent="0" algn="l" defTabSz="896386" rtl="0" eaLnBrk="1" fontAlgn="auto" latinLnBrk="0" hangingPunct="1">
+                <a:lnSpc>
+                  <a:spcPct val="100000"/>
+                </a:lnSpc>
+                <a:spcBef>
+                  <a:spcPts val="0"/>
+                </a:spcBef>
+                <a:spcAft>
+                  <a:spcPts val="0"/>
+                </a:spcAft>
+                <a:buClrTx/>
+                <a:buSzTx/>
+                <a:buFontTx/>
+                <a:buNone/>
+                <a:tabLst/>
+                <a:defRPr/>
+              </a:pPr>
+              <a:r>
+                <a:rPr lang="en-US" sz="1700" dirty="0">
+                  <a:solidFill>
+                    <a:schemeClr val="tx1"/>
+                  </a:solidFill>
+                </a:rPr>
+                <a:t>Brandon-Minnick</a:t>
+              </a:r>
             </a:p>
           </p:txBody>
         </p:sp>
@@ -8674,15 +8934,6 @@
 </file>
 
 <file path=customXml/item2.xml><?xml version="1.0" encoding="utf-8"?>
-<?mso-contentType ?>
-<FormTemplates xmlns="http://schemas.microsoft.com/sharepoint/v3/contenttype/forms">
-  <Display>DocumentLibraryForm</Display>
-  <Edit>DocumentLibraryForm</Edit>
-  <New>DocumentLibraryForm</New>
-</FormTemplates>
-</file>
-
-<file path=customXml/item3.xml><?xml version="1.0" encoding="utf-8"?>
 <ct:contentTypeSchema xmlns:ct="http://schemas.microsoft.com/office/2006/metadata/contentType" xmlns:ma="http://schemas.microsoft.com/office/2006/metadata/properties/metaAttributes" ct:_="" ma:_="" ma:contentTypeName="Document" ma:contentTypeID="0x010100A33D2391BFF58241AEB203BD95DC1F89" ma:contentTypeVersion="16" ma:contentTypeDescription="Create a new document." ma:contentTypeScope="" ma:versionID="bd4b5e6fa70efd11586bd069caa6259f">
   <xsd:schema xmlns:xsd="http://www.w3.org/2001/XMLSchema" xmlns:xs="http://www.w3.org/2001/XMLSchema" xmlns:p="http://schemas.microsoft.com/office/2006/metadata/properties" xmlns:ns1="http://schemas.microsoft.com/sharepoint/v3" xmlns:ns2="16dc66bd-df5a-4495-a5c9-5e296f49988a" xmlns:ns3="12239fb0-26c0-4a37-b790-6c81fba9d0fc" targetNamespace="http://schemas.microsoft.com/office/2006/metadata/properties" ma:root="true" ma:fieldsID="1236f19879e555dfdef409a5be7c6d72" ns1:_="" ns2:_="" ns3:_="">
     <xsd:import namespace="http://schemas.microsoft.com/sharepoint/v3"/>
@@ -8928,6 +9179,15 @@
 </ct:contentTypeSchema>
 </file>
 
+<file path=customXml/item3.xml><?xml version="1.0" encoding="utf-8"?>
+<?mso-contentType ?>
+<FormTemplates xmlns="http://schemas.microsoft.com/sharepoint/v3/contenttype/forms">
+  <Display>DocumentLibraryForm</Display>
+  <Edit>DocumentLibraryForm</Edit>
+  <New>DocumentLibraryForm</New>
+</FormTemplates>
+</file>
+
 <file path=customXml/itemProps1.xml><?xml version="1.0" encoding="utf-8"?>
 <ds:datastoreItem xmlns:ds="http://schemas.openxmlformats.org/officeDocument/2006/customXml" ds:itemID="{B59C5458-A72E-4627-9FFC-D350DCB4700F}">
   <ds:schemaRefs>
@@ -8947,14 +9207,6 @@
 </file>
 
 <file path=customXml/itemProps2.xml><?xml version="1.0" encoding="utf-8"?>
-<ds:datastoreItem xmlns:ds="http://schemas.openxmlformats.org/officeDocument/2006/customXml" ds:itemID="{758FDAC0-319D-4A54-8D8E-1D42CB1F8004}">
-  <ds:schemaRefs>
-    <ds:schemaRef ds:uri="http://schemas.microsoft.com/sharepoint/v3/contenttype/forms"/>
-  </ds:schemaRefs>
-</ds:datastoreItem>
-</file>
-
-<file path=customXml/itemProps3.xml><?xml version="1.0" encoding="utf-8"?>
 <ds:datastoreItem xmlns:ds="http://schemas.openxmlformats.org/officeDocument/2006/customXml" ds:itemID="{F517AA3B-FC88-46DF-B5BA-DC6634CFCC94}">
   <ds:schemaRefs>
     <ds:schemaRef ds:uri="12239fb0-26c0-4a37-b790-6c81fba9d0fc"/>
@@ -8974,6 +9226,14 @@
 </ds:datastoreItem>
 </file>
 
+<file path=customXml/itemProps3.xml><?xml version="1.0" encoding="utf-8"?>
+<ds:datastoreItem xmlns:ds="http://schemas.openxmlformats.org/officeDocument/2006/customXml" ds:itemID="{758FDAC0-319D-4A54-8D8E-1D42CB1F8004}">
+  <ds:schemaRefs>
+    <ds:schemaRef ds:uri="http://schemas.microsoft.com/sharepoint/v3/contenttype/forms"/>
+  </ds:schemaRefs>
+</ds:datastoreItem>
+</file>
+
 <file path=docMetadata/LabelInfo.xml><?xml version="1.0" encoding="utf-8"?>
 <clbl:labelList xmlns:clbl="http://schemas.microsoft.com/office/2020/mipLabelMetadata">
   <clbl:label id="{f42aa342-8706-4288-bd11-ebb85995028c}" enabled="1" method="Privileged" siteId="{72f988bf-86f1-41af-91ab-2d7cd011db47}" removed="0"/>
